--- a/presentasi/BPF_WorkHub_Presentasi.pptx
+++ b/presentasi/BPF_WorkHub_Presentasi.pptx
@@ -17,6 +17,7 @@
     <p:sldId id="265" r:id="rId16"/>
     <p:sldId id="266" r:id="rId17"/>
     <p:sldId id="267" r:id="rId18"/>
+    <p:sldId id="268" r:id="rId19"/>
   </p:sldIdLst>
   <p:sldSz cx="12191695" cy="6858000" type="screen4x3"/>
   <p:notesSz cx="6858000" cy="9144000"/>
@@ -4016,7 +4017,7 @@
                   <a:srgbClr val="64748B"/>
                 </a:solidFill>
               </a:rPr>
-              <a:t>1 / 12</a:t>
+              <a:t>1 / 13</a:t>
             </a:r>
           </a:p>
         </p:txBody>
@@ -4030,6 +4031,561 @@
 </file>
 
 <file path=ppt/slides/slide10.xml><?xml version="1.0" encoding="utf-8"?>
+<p:sld xmlns:a="http://schemas.openxmlformats.org/drawingml/2006/main" xmlns:p="http://schemas.openxmlformats.org/presentationml/2006/main" xmlns:r="http://schemas.openxmlformats.org/officeDocument/2006/relationships">
+  <p:cSld>
+    <p:spTree>
+      <p:nvGrpSpPr>
+        <p:cNvPr id="1" name=""/>
+        <p:cNvGrpSpPr/>
+        <p:nvPr/>
+      </p:nvGrpSpPr>
+      <p:grpSpPr/>
+      <p:sp>
+        <p:nvSpPr>
+          <p:cNvPr id="2" name="TextBox 1"/>
+          <p:cNvSpPr txBox="1"/>
+          <p:nvPr/>
+        </p:nvSpPr>
+        <p:spPr>
+          <a:xfrm>
+            <a:off x="822960" y="411480"/>
+            <a:ext cx="10058400" cy="365760"/>
+          </a:xfrm>
+          <a:prstGeom prst="rect">
+            <a:avLst/>
+          </a:prstGeom>
+          <a:noFill/>
+        </p:spPr>
+        <p:txBody>
+          <a:bodyPr wrap="square" anchor="t">
+            <a:spAutoFit/>
+          </a:bodyPr>
+          <a:lstStyle/>
+          <a:p>
+            <a:pPr algn="l">
+              <a:lnSpc>
+                <a:spcPct val="115000"/>
+              </a:lnSpc>
+            </a:pPr>
+            <a:r>
+              <a:rPr sz="1300" b="1">
+                <a:solidFill>
+                  <a:srgbClr val="2563EB"/>
+                </a:solidFill>
+              </a:rPr>
+              <a:t>DEMO PENDUKUNG</a:t>
+            </a:r>
+          </a:p>
+        </p:txBody>
+      </p:sp>
+      <p:sp>
+        <p:nvSpPr>
+          <p:cNvPr id="3" name="TextBox 2"/>
+          <p:cNvSpPr txBox="1"/>
+          <p:nvPr/>
+        </p:nvSpPr>
+        <p:spPr>
+          <a:xfrm>
+            <a:off x="822960" y="777240"/>
+            <a:ext cx="10515600" cy="822960"/>
+          </a:xfrm>
+          <a:prstGeom prst="rect">
+            <a:avLst/>
+          </a:prstGeom>
+          <a:noFill/>
+        </p:spPr>
+        <p:txBody>
+          <a:bodyPr wrap="square" anchor="t">
+            <a:spAutoFit/>
+          </a:bodyPr>
+          <a:lstStyle/>
+          <a:p>
+            <a:pPr algn="l">
+              <a:lnSpc>
+                <a:spcPct val="115000"/>
+              </a:lnSpc>
+            </a:pPr>
+            <a:r>
+              <a:rPr sz="3400" b="1">
+                <a:solidFill>
+                  <a:srgbClr val="0F172A"/>
+                </a:solidFill>
+              </a:rPr>
+              <a:t>Marketing &amp; Chief Driver</a:t>
+            </a:r>
+          </a:p>
+        </p:txBody>
+      </p:sp>
+      <p:sp>
+        <p:nvSpPr>
+          <p:cNvPr id="4" name="Rectangle 3"/>
+          <p:cNvSpPr/>
+          <p:nvPr/>
+        </p:nvSpPr>
+        <p:spPr>
+          <a:xfrm>
+            <a:off x="822960" y="2011680"/>
+            <a:ext cx="-125413846200" cy="2926080"/>
+          </a:xfrm>
+          <a:prstGeom prst="rect">
+            <a:avLst/>
+          </a:prstGeom>
+          <a:solidFill>
+            <a:srgbClr val="FFFFFF"/>
+          </a:solidFill>
+          <a:ln w="12700">
+            <a:solidFill>
+              <a:srgbClr val="E2E8F0"/>
+            </a:solidFill>
+          </a:ln>
+        </p:spPr>
+        <p:style>
+          <a:lnRef idx="1">
+            <a:schemeClr val="accent1"/>
+          </a:lnRef>
+          <a:fillRef idx="3">
+            <a:schemeClr val="accent1"/>
+          </a:fillRef>
+          <a:effectRef idx="2">
+            <a:schemeClr val="accent1"/>
+          </a:effectRef>
+          <a:fontRef idx="minor">
+            <a:schemeClr val="lt1"/>
+          </a:fontRef>
+        </p:style>
+        <p:txBody>
+          <a:bodyPr rtlCol="0" anchor="ctr"/>
+          <a:lstStyle/>
+          <a:p>
+            <a:pPr algn="ctr"/>
+          </a:p>
+        </p:txBody>
+      </p:sp>
+      <p:sp>
+        <p:nvSpPr>
+          <p:cNvPr id="5" name="TextBox 4"/>
+          <p:cNvSpPr txBox="1"/>
+          <p:nvPr/>
+        </p:nvSpPr>
+        <p:spPr>
+          <a:xfrm>
+            <a:off x="1051560" y="2286000"/>
+            <a:ext cx="-125414303400" cy="548640"/>
+          </a:xfrm>
+          <a:prstGeom prst="rect">
+            <a:avLst/>
+          </a:prstGeom>
+          <a:noFill/>
+        </p:spPr>
+        <p:txBody>
+          <a:bodyPr wrap="square" anchor="t">
+            <a:spAutoFit/>
+          </a:bodyPr>
+          <a:lstStyle/>
+          <a:p>
+            <a:pPr algn="l">
+              <a:lnSpc>
+                <a:spcPct val="115000"/>
+              </a:lnSpc>
+            </a:pPr>
+            <a:r>
+              <a:rPr sz="2800" b="0">
+                <a:solidFill>
+                  <a:srgbClr val="0F172A"/>
+                </a:solidFill>
+              </a:rPr>
+              <a:t>📅</a:t>
+            </a:r>
+          </a:p>
+        </p:txBody>
+      </p:sp>
+      <p:sp>
+        <p:nvSpPr>
+          <p:cNvPr id="6" name="TextBox 5"/>
+          <p:cNvSpPr txBox="1"/>
+          <p:nvPr/>
+        </p:nvSpPr>
+        <p:spPr>
+          <a:xfrm>
+            <a:off x="1051560" y="2926080"/>
+            <a:ext cx="-125414303400" cy="548640"/>
+          </a:xfrm>
+          <a:prstGeom prst="rect">
+            <a:avLst/>
+          </a:prstGeom>
+          <a:noFill/>
+        </p:spPr>
+        <p:txBody>
+          <a:bodyPr wrap="square" anchor="t">
+            <a:spAutoFit/>
+          </a:bodyPr>
+          <a:lstStyle/>
+          <a:p>
+            <a:pPr algn="l">
+              <a:lnSpc>
+                <a:spcPct val="115000"/>
+              </a:lnSpc>
+            </a:pPr>
+            <a:r>
+              <a:rPr sz="1700" b="1">
+                <a:solidFill>
+                  <a:srgbClr val="0F172A"/>
+                </a:solidFill>
+              </a:rPr>
+              <a:t>Marketing Hub</a:t>
+            </a:r>
+          </a:p>
+        </p:txBody>
+      </p:sp>
+      <p:sp>
+        <p:nvSpPr>
+          <p:cNvPr id="7" name="TextBox 6"/>
+          <p:cNvSpPr txBox="1"/>
+          <p:nvPr/>
+        </p:nvSpPr>
+        <p:spPr>
+          <a:xfrm>
+            <a:off x="1051560" y="3429000"/>
+            <a:ext cx="-125414303400" cy="1371600"/>
+          </a:xfrm>
+          <a:prstGeom prst="rect">
+            <a:avLst/>
+          </a:prstGeom>
+          <a:noFill/>
+        </p:spPr>
+        <p:txBody>
+          <a:bodyPr wrap="square" anchor="t">
+            <a:spAutoFit/>
+          </a:bodyPr>
+          <a:lstStyle/>
+          <a:p>
+            <a:pPr algn="l">
+              <a:lnSpc>
+                <a:spcPct val="115000"/>
+              </a:lnSpc>
+            </a:pPr>
+            <a:r>
+              <a:rPr sz="1300" b="0">
+                <a:solidFill>
+                  <a:srgbClr val="64748B"/>
+                </a:solidFill>
+              </a:rPr>
+              <a:t>Input appointment, pantau status, lihat hasil kunjungan — data penjualan tersaji otomatis</a:t>
+            </a:r>
+          </a:p>
+        </p:txBody>
+      </p:sp>
+      <p:sp>
+        <p:nvSpPr>
+          <p:cNvPr id="8" name="Rectangle 7"/>
+          <p:cNvSpPr/>
+          <p:nvPr/>
+        </p:nvSpPr>
+        <p:spPr>
+          <a:xfrm>
+            <a:off x="-125412748920" y="2011680"/>
+            <a:ext cx="-125413846200" cy="2926080"/>
+          </a:xfrm>
+          <a:prstGeom prst="rect">
+            <a:avLst/>
+          </a:prstGeom>
+          <a:solidFill>
+            <a:srgbClr val="FFFFFF"/>
+          </a:solidFill>
+          <a:ln w="12700">
+            <a:solidFill>
+              <a:srgbClr val="E2E8F0"/>
+            </a:solidFill>
+          </a:ln>
+        </p:spPr>
+        <p:style>
+          <a:lnRef idx="1">
+            <a:schemeClr val="accent1"/>
+          </a:lnRef>
+          <a:fillRef idx="3">
+            <a:schemeClr val="accent1"/>
+          </a:fillRef>
+          <a:effectRef idx="2">
+            <a:schemeClr val="accent1"/>
+          </a:effectRef>
+          <a:fontRef idx="minor">
+            <a:schemeClr val="lt1"/>
+          </a:fontRef>
+        </p:style>
+        <p:txBody>
+          <a:bodyPr rtlCol="0" anchor="ctr"/>
+          <a:lstStyle/>
+          <a:p>
+            <a:pPr algn="ctr"/>
+          </a:p>
+        </p:txBody>
+      </p:sp>
+      <p:sp>
+        <p:nvSpPr>
+          <p:cNvPr id="9" name="TextBox 8"/>
+          <p:cNvSpPr txBox="1"/>
+          <p:nvPr/>
+        </p:nvSpPr>
+        <p:spPr>
+          <a:xfrm>
+            <a:off x="-125412520320" y="2286000"/>
+            <a:ext cx="-125414303400" cy="548640"/>
+          </a:xfrm>
+          <a:prstGeom prst="rect">
+            <a:avLst/>
+          </a:prstGeom>
+          <a:noFill/>
+        </p:spPr>
+        <p:txBody>
+          <a:bodyPr wrap="square" anchor="t">
+            <a:spAutoFit/>
+          </a:bodyPr>
+          <a:lstStyle/>
+          <a:p>
+            <a:pPr algn="l">
+              <a:lnSpc>
+                <a:spcPct val="115000"/>
+              </a:lnSpc>
+            </a:pPr>
+            <a:r>
+              <a:rPr sz="2800" b="0">
+                <a:solidFill>
+                  <a:srgbClr val="0F172A"/>
+                </a:solidFill>
+              </a:rPr>
+              <a:t>🚛</a:t>
+            </a:r>
+          </a:p>
+        </p:txBody>
+      </p:sp>
+      <p:sp>
+        <p:nvSpPr>
+          <p:cNvPr id="10" name="TextBox 9"/>
+          <p:cNvSpPr txBox="1"/>
+          <p:nvPr/>
+        </p:nvSpPr>
+        <p:spPr>
+          <a:xfrm>
+            <a:off x="-125412520320" y="2926080"/>
+            <a:ext cx="-125414303400" cy="548640"/>
+          </a:xfrm>
+          <a:prstGeom prst="rect">
+            <a:avLst/>
+          </a:prstGeom>
+          <a:noFill/>
+        </p:spPr>
+        <p:txBody>
+          <a:bodyPr wrap="square" anchor="t">
+            <a:spAutoFit/>
+          </a:bodyPr>
+          <a:lstStyle/>
+          <a:p>
+            <a:pPr algn="l">
+              <a:lnSpc>
+                <a:spcPct val="115000"/>
+              </a:lnSpc>
+            </a:pPr>
+            <a:r>
+              <a:rPr sz="1700" b="1">
+                <a:solidFill>
+                  <a:srgbClr val="0F172A"/>
+                </a:solidFill>
+              </a:rPr>
+              <a:t>Chief Driver</a:t>
+            </a:r>
+          </a:p>
+        </p:txBody>
+      </p:sp>
+      <p:sp>
+        <p:nvSpPr>
+          <p:cNvPr id="11" name="TextBox 10"/>
+          <p:cNvSpPr txBox="1"/>
+          <p:nvPr/>
+        </p:nvSpPr>
+        <p:spPr>
+          <a:xfrm>
+            <a:off x="-125412520320" y="3429000"/>
+            <a:ext cx="-125414303400" cy="1371600"/>
+          </a:xfrm>
+          <a:prstGeom prst="rect">
+            <a:avLst/>
+          </a:prstGeom>
+          <a:noFill/>
+        </p:spPr>
+        <p:txBody>
+          <a:bodyPr wrap="square" anchor="t">
+            <a:spAutoFit/>
+          </a:bodyPr>
+          <a:lstStyle/>
+          <a:p>
+            <a:pPr algn="l">
+              <a:lnSpc>
+                <a:spcPct val="115000"/>
+              </a:lnSpc>
+            </a:pPr>
+            <a:r>
+              <a:rPr sz="1300" b="0">
+                <a:solidFill>
+                  <a:srgbClr val="64748B"/>
+                </a:solidFill>
+              </a:rPr>
+              <a:t>Papan pembagian tugas: kendaraan belum ditugaskan, beban tiap driver, unduh rekap harian Excel</a:t>
+            </a:r>
+          </a:p>
+        </p:txBody>
+      </p:sp>
+      <p:sp>
+        <p:nvSpPr>
+          <p:cNvPr id="12" name="Rectangle 11"/>
+          <p:cNvSpPr/>
+          <p:nvPr/>
+        </p:nvSpPr>
+        <p:spPr>
+          <a:xfrm>
+            <a:off x="822960" y="5394960"/>
+            <a:ext cx="10515600" cy="868680"/>
+          </a:xfrm>
+          <a:prstGeom prst="rect">
+            <a:avLst/>
+          </a:prstGeom>
+          <a:solidFill>
+            <a:srgbClr val="EFF6FF"/>
+          </a:solidFill>
+          <a:ln>
+            <a:noFill/>
+          </a:ln>
+        </p:spPr>
+        <p:style>
+          <a:lnRef idx="1">
+            <a:schemeClr val="accent1"/>
+          </a:lnRef>
+          <a:fillRef idx="3">
+            <a:schemeClr val="accent1"/>
+          </a:fillRef>
+          <a:effectRef idx="2">
+            <a:schemeClr val="accent1"/>
+          </a:effectRef>
+          <a:fontRef idx="minor">
+            <a:schemeClr val="lt1"/>
+          </a:fontRef>
+        </p:style>
+        <p:txBody>
+          <a:bodyPr rtlCol="0" anchor="ctr"/>
+          <a:lstStyle/>
+          <a:p>
+            <a:pPr algn="ctr"/>
+          </a:p>
+        </p:txBody>
+      </p:sp>
+      <p:sp>
+        <p:nvSpPr>
+          <p:cNvPr id="13" name="TextBox 12"/>
+          <p:cNvSpPr txBox="1"/>
+          <p:nvPr/>
+        </p:nvSpPr>
+        <p:spPr>
+          <a:xfrm>
+            <a:off x="1051560" y="5559552"/>
+            <a:ext cx="10058400" cy="640080"/>
+          </a:xfrm>
+          <a:prstGeom prst="rect">
+            <a:avLst/>
+          </a:prstGeom>
+          <a:noFill/>
+        </p:spPr>
+        <p:txBody>
+          <a:bodyPr wrap="square" anchor="ctr">
+            <a:spAutoFit/>
+          </a:bodyPr>
+          <a:lstStyle/>
+          <a:p>
+            <a:pPr algn="l">
+              <a:lnSpc>
+                <a:spcPct val="115000"/>
+              </a:lnSpc>
+            </a:pPr>
+            <a:r>
+              <a:rPr sz="1600" b="1">
+                <a:solidFill>
+                  <a:srgbClr val="0F172A"/>
+                </a:solidFill>
+              </a:rPr>
+              <a:t>🗂️  Kunci: bukan hanya BBM — penjadwalan kunjungan &amp; pembagian sopir juga satu pintu.</a:t>
+            </a:r>
+          </a:p>
+        </p:txBody>
+      </p:sp>
+      <p:pic>
+        <p:nvPicPr>
+          <p:cNvPr id="14" name="Picture 13" descr="bpf-badge.png"/>
+          <p:cNvPicPr>
+            <a:picLocks noChangeAspect="1"/>
+          </p:cNvPicPr>
+          <p:nvPr/>
+        </p:nvPicPr>
+        <p:blipFill>
+          <a:blip r:embed="rId2"/>
+          <a:stretch>
+            <a:fillRect/>
+          </a:stretch>
+        </p:blipFill>
+        <p:spPr>
+          <a:xfrm>
+            <a:off x="274320" y="6355080"/>
+            <a:ext cx="457200" cy="457200"/>
+          </a:xfrm>
+          <a:prstGeom prst="rect">
+            <a:avLst/>
+          </a:prstGeom>
+        </p:spPr>
+      </p:pic>
+      <p:sp>
+        <p:nvSpPr>
+          <p:cNvPr id="15" name="TextBox 14"/>
+          <p:cNvSpPr txBox="1"/>
+          <p:nvPr/>
+        </p:nvSpPr>
+        <p:spPr>
+          <a:xfrm>
+            <a:off x="10881360" y="6446520"/>
+            <a:ext cx="1097280" cy="320040"/>
+          </a:xfrm>
+          <a:prstGeom prst="rect">
+            <a:avLst/>
+          </a:prstGeom>
+          <a:noFill/>
+        </p:spPr>
+        <p:txBody>
+          <a:bodyPr wrap="square" anchor="t">
+            <a:spAutoFit/>
+          </a:bodyPr>
+          <a:lstStyle/>
+          <a:p>
+            <a:pPr algn="r">
+              <a:lnSpc>
+                <a:spcPct val="115000"/>
+              </a:lnSpc>
+            </a:pPr>
+            <a:r>
+              <a:rPr sz="1100" b="0">
+                <a:solidFill>
+                  <a:srgbClr val="64748B"/>
+                </a:solidFill>
+              </a:rPr>
+              <a:t>9 / 13</a:t>
+            </a:r>
+          </a:p>
+        </p:txBody>
+      </p:sp>
+    </p:spTree>
+  </p:cSld>
+  <p:clrMapOvr>
+    <a:masterClrMapping/>
+  </p:clrMapOvr>
+</p:sld>
+</file>
+
+<file path=ppt/slides/slide11.xml><?xml version="1.0" encoding="utf-8"?>
 <p:sld xmlns:a="http://schemas.openxmlformats.org/drawingml/2006/main" xmlns:p="http://schemas.openxmlformats.org/presentationml/2006/main" xmlns:r="http://schemas.openxmlformats.org/officeDocument/2006/relationships">
   <p:cSld>
     <p:spTree>
@@ -4603,880 +5159,7 @@
                   <a:srgbClr val="64748B"/>
                 </a:solidFill>
               </a:rPr>
-              <a:t>10 / 12</a:t>
-            </a:r>
-          </a:p>
-        </p:txBody>
-      </p:sp>
-    </p:spTree>
-  </p:cSld>
-  <p:clrMapOvr>
-    <a:masterClrMapping/>
-  </p:clrMapOvr>
-</p:sld>
-</file>
-
-<file path=ppt/slides/slide11.xml><?xml version="1.0" encoding="utf-8"?>
-<p:sld xmlns:a="http://schemas.openxmlformats.org/drawingml/2006/main" xmlns:p="http://schemas.openxmlformats.org/presentationml/2006/main" xmlns:r="http://schemas.openxmlformats.org/officeDocument/2006/relationships">
-  <p:cSld>
-    <p:spTree>
-      <p:nvGrpSpPr>
-        <p:cNvPr id="1" name=""/>
-        <p:cNvGrpSpPr/>
-        <p:nvPr/>
-      </p:nvGrpSpPr>
-      <p:grpSpPr/>
-      <p:sp>
-        <p:nvSpPr>
-          <p:cNvPr id="2" name="TextBox 1"/>
-          <p:cNvSpPr txBox="1"/>
-          <p:nvPr/>
-        </p:nvSpPr>
-        <p:spPr>
-          <a:xfrm>
-            <a:off x="822960" y="411480"/>
-            <a:ext cx="10058400" cy="365760"/>
-          </a:xfrm>
-          <a:prstGeom prst="rect">
-            <a:avLst/>
-          </a:prstGeom>
-          <a:noFill/>
-        </p:spPr>
-        <p:txBody>
-          <a:bodyPr wrap="square" anchor="t">
-            <a:spAutoFit/>
-          </a:bodyPr>
-          <a:lstStyle/>
-          <a:p>
-            <a:pPr algn="l">
-              <a:lnSpc>
-                <a:spcPct val="115000"/>
-              </a:lnSpc>
-            </a:pPr>
-            <a:r>
-              <a:rPr sz="1300" b="1">
-                <a:solidFill>
-                  <a:srgbClr val="2563EB"/>
-                </a:solidFill>
-              </a:rPr>
-              <a:t>KREDIBILITAS</a:t>
-            </a:r>
-          </a:p>
-        </p:txBody>
-      </p:sp>
-      <p:sp>
-        <p:nvSpPr>
-          <p:cNvPr id="3" name="TextBox 2"/>
-          <p:cNvSpPr txBox="1"/>
-          <p:nvPr/>
-        </p:nvSpPr>
-        <p:spPr>
-          <a:xfrm>
-            <a:off x="822960" y="777240"/>
-            <a:ext cx="10515600" cy="822960"/>
-          </a:xfrm>
-          <a:prstGeom prst="rect">
-            <a:avLst/>
-          </a:prstGeom>
-          <a:noFill/>
-        </p:spPr>
-        <p:txBody>
-          <a:bodyPr wrap="square" anchor="t">
-            <a:spAutoFit/>
-          </a:bodyPr>
-          <a:lstStyle/>
-          <a:p>
-            <a:pPr algn="l">
-              <a:lnSpc>
-                <a:spcPct val="115000"/>
-              </a:lnSpc>
-            </a:pPr>
-            <a:r>
-              <a:rPr sz="3400" b="1">
-                <a:solidFill>
-                  <a:srgbClr val="0F172A"/>
-                </a:solidFill>
-              </a:rPr>
-              <a:t>Kualitas &amp; Kepatuhan</a:t>
-            </a:r>
-          </a:p>
-        </p:txBody>
-      </p:sp>
-      <p:sp>
-        <p:nvSpPr>
-          <p:cNvPr id="4" name="Rectangle 3"/>
-          <p:cNvSpPr/>
-          <p:nvPr/>
-        </p:nvSpPr>
-        <p:spPr>
-          <a:xfrm>
-            <a:off x="822960" y="1920240"/>
-            <a:ext cx="-188126027100" cy="2926080"/>
-          </a:xfrm>
-          <a:prstGeom prst="rect">
-            <a:avLst/>
-          </a:prstGeom>
-          <a:solidFill>
-            <a:srgbClr val="FFFFFF"/>
-          </a:solidFill>
-          <a:ln w="12700">
-            <a:solidFill>
-              <a:srgbClr val="E2E8F0"/>
-            </a:solidFill>
-          </a:ln>
-        </p:spPr>
-        <p:style>
-          <a:lnRef idx="1">
-            <a:schemeClr val="accent1"/>
-          </a:lnRef>
-          <a:fillRef idx="3">
-            <a:schemeClr val="accent1"/>
-          </a:fillRef>
-          <a:effectRef idx="2">
-            <a:schemeClr val="accent1"/>
-          </a:effectRef>
-          <a:fontRef idx="minor">
-            <a:schemeClr val="lt1"/>
-          </a:fontRef>
-        </p:style>
-        <p:txBody>
-          <a:bodyPr rtlCol="0" anchor="ctr"/>
-          <a:lstStyle/>
-          <a:p>
-            <a:pPr algn="ctr"/>
-          </a:p>
-        </p:txBody>
-      </p:sp>
-      <p:sp>
-        <p:nvSpPr>
-          <p:cNvPr id="5" name="TextBox 4"/>
-          <p:cNvSpPr txBox="1"/>
-          <p:nvPr/>
-        </p:nvSpPr>
-        <p:spPr>
-          <a:xfrm>
-            <a:off x="1051560" y="2194560"/>
-            <a:ext cx="-188126484300" cy="548640"/>
-          </a:xfrm>
-          <a:prstGeom prst="rect">
-            <a:avLst/>
-          </a:prstGeom>
-          <a:noFill/>
-        </p:spPr>
-        <p:txBody>
-          <a:bodyPr wrap="square" anchor="t">
-            <a:spAutoFit/>
-          </a:bodyPr>
-          <a:lstStyle/>
-          <a:p>
-            <a:pPr algn="l">
-              <a:lnSpc>
-                <a:spcPct val="115000"/>
-              </a:lnSpc>
-            </a:pPr>
-            <a:r>
-              <a:rPr sz="2800" b="0">
-                <a:solidFill>
-                  <a:srgbClr val="0F172A"/>
-                </a:solidFill>
-              </a:rPr>
-              <a:t>✅</a:t>
-            </a:r>
-          </a:p>
-        </p:txBody>
-      </p:sp>
-      <p:sp>
-        <p:nvSpPr>
-          <p:cNvPr id="6" name="TextBox 5"/>
-          <p:cNvSpPr txBox="1"/>
-          <p:nvPr/>
-        </p:nvSpPr>
-        <p:spPr>
-          <a:xfrm>
-            <a:off x="1051560" y="2834640"/>
-            <a:ext cx="-188126484300" cy="548640"/>
-          </a:xfrm>
-          <a:prstGeom prst="rect">
-            <a:avLst/>
-          </a:prstGeom>
-          <a:noFill/>
-        </p:spPr>
-        <p:txBody>
-          <a:bodyPr wrap="square" anchor="t">
-            <a:spAutoFit/>
-          </a:bodyPr>
-          <a:lstStyle/>
-          <a:p>
-            <a:pPr algn="l">
-              <a:lnSpc>
-                <a:spcPct val="115000"/>
-              </a:lnSpc>
-            </a:pPr>
-            <a:r>
-              <a:rPr sz="1700" b="1">
-                <a:solidFill>
-                  <a:srgbClr val="0F172A"/>
-                </a:solidFill>
-              </a:rPr>
-              <a:t>179 uji otomatis</a:t>
-            </a:r>
-          </a:p>
-        </p:txBody>
-      </p:sp>
-      <p:sp>
-        <p:nvSpPr>
-          <p:cNvPr id="7" name="TextBox 6"/>
-          <p:cNvSpPr txBox="1"/>
-          <p:nvPr/>
-        </p:nvSpPr>
-        <p:spPr>
-          <a:xfrm>
-            <a:off x="1051560" y="3337560"/>
-            <a:ext cx="-188126484300" cy="1371600"/>
-          </a:xfrm>
-          <a:prstGeom prst="rect">
-            <a:avLst/>
-          </a:prstGeom>
-          <a:noFill/>
-        </p:spPr>
-        <p:txBody>
-          <a:bodyPr wrap="square" anchor="t">
-            <a:spAutoFit/>
-          </a:bodyPr>
-          <a:lstStyle/>
-          <a:p>
-            <a:pPr algn="l">
-              <a:lnSpc>
-                <a:spcPct val="115000"/>
-              </a:lnSpc>
-            </a:pPr>
-            <a:r>
-              <a:rPr sz="1300" b="0">
-                <a:solidFill>
-                  <a:srgbClr val="64748B"/>
-                </a:solidFill>
-              </a:rPr>
-              <a:t>97 backend + 82 frontend — setiap perubahan diuji</a:t>
-            </a:r>
-          </a:p>
-        </p:txBody>
-      </p:sp>
-      <p:sp>
-        <p:nvSpPr>
-          <p:cNvPr id="8" name="Rectangle 7"/>
-          <p:cNvSpPr/>
-          <p:nvPr/>
-        </p:nvSpPr>
-        <p:spPr>
-          <a:xfrm>
-            <a:off x="-188124929820" y="1920240"/>
-            <a:ext cx="-188126027100" cy="2926080"/>
-          </a:xfrm>
-          <a:prstGeom prst="rect">
-            <a:avLst/>
-          </a:prstGeom>
-          <a:solidFill>
-            <a:srgbClr val="FFFFFF"/>
-          </a:solidFill>
-          <a:ln w="12700">
-            <a:solidFill>
-              <a:srgbClr val="E2E8F0"/>
-            </a:solidFill>
-          </a:ln>
-        </p:spPr>
-        <p:style>
-          <a:lnRef idx="1">
-            <a:schemeClr val="accent1"/>
-          </a:lnRef>
-          <a:fillRef idx="3">
-            <a:schemeClr val="accent1"/>
-          </a:fillRef>
-          <a:effectRef idx="2">
-            <a:schemeClr val="accent1"/>
-          </a:effectRef>
-          <a:fontRef idx="minor">
-            <a:schemeClr val="lt1"/>
-          </a:fontRef>
-        </p:style>
-        <p:txBody>
-          <a:bodyPr rtlCol="0" anchor="ctr"/>
-          <a:lstStyle/>
-          <a:p>
-            <a:pPr algn="ctr"/>
-          </a:p>
-        </p:txBody>
-      </p:sp>
-      <p:sp>
-        <p:nvSpPr>
-          <p:cNvPr id="9" name="TextBox 8"/>
-          <p:cNvSpPr txBox="1"/>
-          <p:nvPr/>
-        </p:nvSpPr>
-        <p:spPr>
-          <a:xfrm>
-            <a:off x="-188124701220" y="2194560"/>
-            <a:ext cx="-188126484300" cy="548640"/>
-          </a:xfrm>
-          <a:prstGeom prst="rect">
-            <a:avLst/>
-          </a:prstGeom>
-          <a:noFill/>
-        </p:spPr>
-        <p:txBody>
-          <a:bodyPr wrap="square" anchor="t">
-            <a:spAutoFit/>
-          </a:bodyPr>
-          <a:lstStyle/>
-          <a:p>
-            <a:pPr algn="l">
-              <a:lnSpc>
-                <a:spcPct val="115000"/>
-              </a:lnSpc>
-            </a:pPr>
-            <a:r>
-              <a:rPr sz="2800" b="0">
-                <a:solidFill>
-                  <a:srgbClr val="0F172A"/>
-                </a:solidFill>
-              </a:rPr>
-              <a:t>🌐</a:t>
-            </a:r>
-          </a:p>
-        </p:txBody>
-      </p:sp>
-      <p:sp>
-        <p:nvSpPr>
-          <p:cNvPr id="10" name="TextBox 9"/>
-          <p:cNvSpPr txBox="1"/>
-          <p:nvPr/>
-        </p:nvSpPr>
-        <p:spPr>
-          <a:xfrm>
-            <a:off x="-188124701220" y="2834640"/>
-            <a:ext cx="-188126484300" cy="548640"/>
-          </a:xfrm>
-          <a:prstGeom prst="rect">
-            <a:avLst/>
-          </a:prstGeom>
-          <a:noFill/>
-        </p:spPr>
-        <p:txBody>
-          <a:bodyPr wrap="square" anchor="t">
-            <a:spAutoFit/>
-          </a:bodyPr>
-          <a:lstStyle/>
-          <a:p>
-            <a:pPr algn="l">
-              <a:lnSpc>
-                <a:spcPct val="115000"/>
-              </a:lnSpc>
-            </a:pPr>
-            <a:r>
-              <a:rPr sz="1700" b="1">
-                <a:solidFill>
-                  <a:srgbClr val="0F172A"/>
-                </a:solidFill>
-              </a:rPr>
-              <a:t>E2E di produksi</a:t>
-            </a:r>
-          </a:p>
-        </p:txBody>
-      </p:sp>
-      <p:sp>
-        <p:nvSpPr>
-          <p:cNvPr id="11" name="TextBox 10"/>
-          <p:cNvSpPr txBox="1"/>
-          <p:nvPr/>
-        </p:nvSpPr>
-        <p:spPr>
-          <a:xfrm>
-            <a:off x="-188124701220" y="3337560"/>
-            <a:ext cx="-188126484300" cy="1371600"/>
-          </a:xfrm>
-          <a:prstGeom prst="rect">
-            <a:avLst/>
-          </a:prstGeom>
-          <a:noFill/>
-        </p:spPr>
-        <p:txBody>
-          <a:bodyPr wrap="square" anchor="t">
-            <a:spAutoFit/>
-          </a:bodyPr>
-          <a:lstStyle/>
-          <a:p>
-            <a:pPr algn="l">
-              <a:lnSpc>
-                <a:spcPct val="115000"/>
-              </a:lnSpc>
-            </a:pPr>
-            <a:r>
-              <a:rPr sz="1300" b="0">
-                <a:solidFill>
-                  <a:srgbClr val="64748B"/>
-                </a:solidFill>
-              </a:rPr>
-              <a:t>Alur kritis diverifikasi di lingkungan nyata</a:t>
-            </a:r>
-          </a:p>
-        </p:txBody>
-      </p:sp>
-      <p:sp>
-        <p:nvSpPr>
-          <p:cNvPr id="12" name="Rectangle 11"/>
-          <p:cNvSpPr/>
-          <p:nvPr/>
-        </p:nvSpPr>
-        <p:spPr>
-          <a:xfrm>
-            <a:off x="-376250682600" y="1920240"/>
-            <a:ext cx="-188126027100" cy="2926080"/>
-          </a:xfrm>
-          <a:prstGeom prst="rect">
-            <a:avLst/>
-          </a:prstGeom>
-          <a:solidFill>
-            <a:srgbClr val="FFFFFF"/>
-          </a:solidFill>
-          <a:ln w="12700">
-            <a:solidFill>
-              <a:srgbClr val="E2E8F0"/>
-            </a:solidFill>
-          </a:ln>
-        </p:spPr>
-        <p:style>
-          <a:lnRef idx="1">
-            <a:schemeClr val="accent1"/>
-          </a:lnRef>
-          <a:fillRef idx="3">
-            <a:schemeClr val="accent1"/>
-          </a:fillRef>
-          <a:effectRef idx="2">
-            <a:schemeClr val="accent1"/>
-          </a:effectRef>
-          <a:fontRef idx="minor">
-            <a:schemeClr val="lt1"/>
-          </a:fontRef>
-        </p:style>
-        <p:txBody>
-          <a:bodyPr rtlCol="0" anchor="ctr"/>
-          <a:lstStyle/>
-          <a:p>
-            <a:pPr algn="ctr"/>
-          </a:p>
-        </p:txBody>
-      </p:sp>
-      <p:sp>
-        <p:nvSpPr>
-          <p:cNvPr id="13" name="TextBox 12"/>
-          <p:cNvSpPr txBox="1"/>
-          <p:nvPr/>
-        </p:nvSpPr>
-        <p:spPr>
-          <a:xfrm>
-            <a:off x="-376250454000" y="2194560"/>
-            <a:ext cx="-188126484300" cy="548640"/>
-          </a:xfrm>
-          <a:prstGeom prst="rect">
-            <a:avLst/>
-          </a:prstGeom>
-          <a:noFill/>
-        </p:spPr>
-        <p:txBody>
-          <a:bodyPr wrap="square" anchor="t">
-            <a:spAutoFit/>
-          </a:bodyPr>
-          <a:lstStyle/>
-          <a:p>
-            <a:pPr algn="l">
-              <a:lnSpc>
-                <a:spcPct val="115000"/>
-              </a:lnSpc>
-            </a:pPr>
-            <a:r>
-              <a:rPr sz="2800" b="0">
-                <a:solidFill>
-                  <a:srgbClr val="0F172A"/>
-                </a:solidFill>
-              </a:rPr>
-              <a:t>📜</a:t>
-            </a:r>
-          </a:p>
-        </p:txBody>
-      </p:sp>
-      <p:sp>
-        <p:nvSpPr>
-          <p:cNvPr id="14" name="TextBox 13"/>
-          <p:cNvSpPr txBox="1"/>
-          <p:nvPr/>
-        </p:nvSpPr>
-        <p:spPr>
-          <a:xfrm>
-            <a:off x="-376250454000" y="2834640"/>
-            <a:ext cx="-188126484300" cy="548640"/>
-          </a:xfrm>
-          <a:prstGeom prst="rect">
-            <a:avLst/>
-          </a:prstGeom>
-          <a:noFill/>
-        </p:spPr>
-        <p:txBody>
-          <a:bodyPr wrap="square" anchor="t">
-            <a:spAutoFit/>
-          </a:bodyPr>
-          <a:lstStyle/>
-          <a:p>
-            <a:pPr algn="l">
-              <a:lnSpc>
-                <a:spcPct val="115000"/>
-              </a:lnSpc>
-            </a:pPr>
-            <a:r>
-              <a:rPr sz="1700" b="1">
-                <a:solidFill>
-                  <a:srgbClr val="0F172A"/>
-                </a:solidFill>
-              </a:rPr>
-              <a:t>Standar ISO</a:t>
-            </a:r>
-          </a:p>
-        </p:txBody>
-      </p:sp>
-      <p:sp>
-        <p:nvSpPr>
-          <p:cNvPr id="15" name="TextBox 14"/>
-          <p:cNvSpPr txBox="1"/>
-          <p:nvPr/>
-        </p:nvSpPr>
-        <p:spPr>
-          <a:xfrm>
-            <a:off x="-376250454000" y="3337560"/>
-            <a:ext cx="-188126484300" cy="1371600"/>
-          </a:xfrm>
-          <a:prstGeom prst="rect">
-            <a:avLst/>
-          </a:prstGeom>
-          <a:noFill/>
-        </p:spPr>
-        <p:txBody>
-          <a:bodyPr wrap="square" anchor="t">
-            <a:spAutoFit/>
-          </a:bodyPr>
-          <a:lstStyle/>
-          <a:p>
-            <a:pPr algn="l">
-              <a:lnSpc>
-                <a:spcPct val="115000"/>
-              </a:lnSpc>
-            </a:pPr>
-            <a:r>
-              <a:rPr sz="1300" b="0">
-                <a:solidFill>
-                  <a:srgbClr val="64748B"/>
-                </a:solidFill>
-              </a:rPr>
-              <a:t>27001 (keamanan) · 9241-11 (UX) · 9001 (mutu)</a:t>
-            </a:r>
-          </a:p>
-        </p:txBody>
-      </p:sp>
-      <p:sp>
-        <p:nvSpPr>
-          <p:cNvPr id="16" name="Rectangle 15"/>
-          <p:cNvSpPr/>
-          <p:nvPr/>
-        </p:nvSpPr>
-        <p:spPr>
-          <a:xfrm>
-            <a:off x="-564376435380" y="1920240"/>
-            <a:ext cx="-188126027100" cy="2926080"/>
-          </a:xfrm>
-          <a:prstGeom prst="rect">
-            <a:avLst/>
-          </a:prstGeom>
-          <a:solidFill>
-            <a:srgbClr val="FFFFFF"/>
-          </a:solidFill>
-          <a:ln w="12700">
-            <a:solidFill>
-              <a:srgbClr val="E2E8F0"/>
-            </a:solidFill>
-          </a:ln>
-        </p:spPr>
-        <p:style>
-          <a:lnRef idx="1">
-            <a:schemeClr val="accent1"/>
-          </a:lnRef>
-          <a:fillRef idx="3">
-            <a:schemeClr val="accent1"/>
-          </a:fillRef>
-          <a:effectRef idx="2">
-            <a:schemeClr val="accent1"/>
-          </a:effectRef>
-          <a:fontRef idx="minor">
-            <a:schemeClr val="lt1"/>
-          </a:fontRef>
-        </p:style>
-        <p:txBody>
-          <a:bodyPr rtlCol="0" anchor="ctr"/>
-          <a:lstStyle/>
-          <a:p>
-            <a:pPr algn="ctr"/>
-          </a:p>
-        </p:txBody>
-      </p:sp>
-      <p:sp>
-        <p:nvSpPr>
-          <p:cNvPr id="17" name="TextBox 16"/>
-          <p:cNvSpPr txBox="1"/>
-          <p:nvPr/>
-        </p:nvSpPr>
-        <p:spPr>
-          <a:xfrm>
-            <a:off x="-564376206780" y="2194560"/>
-            <a:ext cx="-188126484300" cy="548640"/>
-          </a:xfrm>
-          <a:prstGeom prst="rect">
-            <a:avLst/>
-          </a:prstGeom>
-          <a:noFill/>
-        </p:spPr>
-        <p:txBody>
-          <a:bodyPr wrap="square" anchor="t">
-            <a:spAutoFit/>
-          </a:bodyPr>
-          <a:lstStyle/>
-          <a:p>
-            <a:pPr algn="l">
-              <a:lnSpc>
-                <a:spcPct val="115000"/>
-              </a:lnSpc>
-            </a:pPr>
-            <a:r>
-              <a:rPr sz="2800" b="0">
-                <a:solidFill>
-                  <a:srgbClr val="0F172A"/>
-                </a:solidFill>
-              </a:rPr>
-              <a:t>♿</a:t>
-            </a:r>
-          </a:p>
-        </p:txBody>
-      </p:sp>
-      <p:sp>
-        <p:nvSpPr>
-          <p:cNvPr id="18" name="TextBox 17"/>
-          <p:cNvSpPr txBox="1"/>
-          <p:nvPr/>
-        </p:nvSpPr>
-        <p:spPr>
-          <a:xfrm>
-            <a:off x="-564376206780" y="2834640"/>
-            <a:ext cx="-188126484300" cy="548640"/>
-          </a:xfrm>
-          <a:prstGeom prst="rect">
-            <a:avLst/>
-          </a:prstGeom>
-          <a:noFill/>
-        </p:spPr>
-        <p:txBody>
-          <a:bodyPr wrap="square" anchor="t">
-            <a:spAutoFit/>
-          </a:bodyPr>
-          <a:lstStyle/>
-          <a:p>
-            <a:pPr algn="l">
-              <a:lnSpc>
-                <a:spcPct val="115000"/>
-              </a:lnSpc>
-            </a:pPr>
-            <a:r>
-              <a:rPr sz="1700" b="1">
-                <a:solidFill>
-                  <a:srgbClr val="0F172A"/>
-                </a:solidFill>
-              </a:rPr>
-              <a:t>Aksesibilitas</a:t>
-            </a:r>
-          </a:p>
-        </p:txBody>
-      </p:sp>
-      <p:sp>
-        <p:nvSpPr>
-          <p:cNvPr id="19" name="TextBox 18"/>
-          <p:cNvSpPr txBox="1"/>
-          <p:nvPr/>
-        </p:nvSpPr>
-        <p:spPr>
-          <a:xfrm>
-            <a:off x="-564376206780" y="3337560"/>
-            <a:ext cx="-188126484300" cy="1371600"/>
-          </a:xfrm>
-          <a:prstGeom prst="rect">
-            <a:avLst/>
-          </a:prstGeom>
-          <a:noFill/>
-        </p:spPr>
-        <p:txBody>
-          <a:bodyPr wrap="square" anchor="t">
-            <a:spAutoFit/>
-          </a:bodyPr>
-          <a:lstStyle/>
-          <a:p>
-            <a:pPr algn="l">
-              <a:lnSpc>
-                <a:spcPct val="115000"/>
-              </a:lnSpc>
-            </a:pPr>
-            <a:r>
-              <a:rPr sz="1300" b="0">
-                <a:solidFill>
-                  <a:srgbClr val="64748B"/>
-                </a:solidFill>
-              </a:rPr>
-              <a:t>Fokus keyboard, kontras ≥ 4,5:1, mode kontras tinggi &amp; gelap</a:t>
-            </a:r>
-          </a:p>
-        </p:txBody>
-      </p:sp>
-      <p:sp>
-        <p:nvSpPr>
-          <p:cNvPr id="20" name="Rectangle 19"/>
-          <p:cNvSpPr/>
-          <p:nvPr/>
-        </p:nvSpPr>
-        <p:spPr>
-          <a:xfrm>
-            <a:off x="822960" y="5394960"/>
-            <a:ext cx="10515600" cy="868680"/>
-          </a:xfrm>
-          <a:prstGeom prst="rect">
-            <a:avLst/>
-          </a:prstGeom>
-          <a:solidFill>
-            <a:srgbClr val="EFF6FF"/>
-          </a:solidFill>
-          <a:ln>
-            <a:noFill/>
-          </a:ln>
-        </p:spPr>
-        <p:style>
-          <a:lnRef idx="1">
-            <a:schemeClr val="accent1"/>
-          </a:lnRef>
-          <a:fillRef idx="3">
-            <a:schemeClr val="accent1"/>
-          </a:fillRef>
-          <a:effectRef idx="2">
-            <a:schemeClr val="accent1"/>
-          </a:effectRef>
-          <a:fontRef idx="minor">
-            <a:schemeClr val="lt1"/>
-          </a:fontRef>
-        </p:style>
-        <p:txBody>
-          <a:bodyPr rtlCol="0" anchor="ctr"/>
-          <a:lstStyle/>
-          <a:p>
-            <a:pPr algn="ctr"/>
-          </a:p>
-        </p:txBody>
-      </p:sp>
-      <p:sp>
-        <p:nvSpPr>
-          <p:cNvPr id="21" name="TextBox 20"/>
-          <p:cNvSpPr txBox="1"/>
-          <p:nvPr/>
-        </p:nvSpPr>
-        <p:spPr>
-          <a:xfrm>
-            <a:off x="1051560" y="5559552"/>
-            <a:ext cx="10058400" cy="640080"/>
-          </a:xfrm>
-          <a:prstGeom prst="rect">
-            <a:avLst/>
-          </a:prstGeom>
-          <a:noFill/>
-        </p:spPr>
-        <p:txBody>
-          <a:bodyPr wrap="square" anchor="ctr">
-            <a:spAutoFit/>
-          </a:bodyPr>
-          <a:lstStyle/>
-          <a:p>
-            <a:pPr algn="l">
-              <a:lnSpc>
-                <a:spcPct val="115000"/>
-              </a:lnSpc>
-            </a:pPr>
-            <a:r>
-              <a:rPr sz="1600" b="1">
-                <a:solidFill>
-                  <a:srgbClr val="0F172A"/>
-                </a:solidFill>
-              </a:rPr>
-              <a:t>🏆  Kunci: bukan prototipe — sistem yang diuji, diamankan, dan siap dipakai harian.</a:t>
-            </a:r>
-          </a:p>
-        </p:txBody>
-      </p:sp>
-      <p:pic>
-        <p:nvPicPr>
-          <p:cNvPr id="22" name="Picture 21" descr="bpf-badge.png"/>
-          <p:cNvPicPr>
-            <a:picLocks noChangeAspect="1"/>
-          </p:cNvPicPr>
-          <p:nvPr/>
-        </p:nvPicPr>
-        <p:blipFill>
-          <a:blip r:embed="rId2"/>
-          <a:stretch>
-            <a:fillRect/>
-          </a:stretch>
-        </p:blipFill>
-        <p:spPr>
-          <a:xfrm>
-            <a:off x="274320" y="6355080"/>
-            <a:ext cx="457200" cy="457200"/>
-          </a:xfrm>
-          <a:prstGeom prst="rect">
-            <a:avLst/>
-          </a:prstGeom>
-        </p:spPr>
-      </p:pic>
-      <p:sp>
-        <p:nvSpPr>
-          <p:cNvPr id="23" name="TextBox 22"/>
-          <p:cNvSpPr txBox="1"/>
-          <p:nvPr/>
-        </p:nvSpPr>
-        <p:spPr>
-          <a:xfrm>
-            <a:off x="10881360" y="6446520"/>
-            <a:ext cx="1097280" cy="320040"/>
-          </a:xfrm>
-          <a:prstGeom prst="rect">
-            <a:avLst/>
-          </a:prstGeom>
-          <a:noFill/>
-        </p:spPr>
-        <p:txBody>
-          <a:bodyPr wrap="square" anchor="t">
-            <a:spAutoFit/>
-          </a:bodyPr>
-          <a:lstStyle/>
-          <a:p>
-            <a:pPr algn="r">
-              <a:lnSpc>
-                <a:spcPct val="115000"/>
-              </a:lnSpc>
-            </a:pPr>
-            <a:r>
-              <a:rPr sz="1100" b="0">
-                <a:solidFill>
-                  <a:srgbClr val="64748B"/>
-                </a:solidFill>
-              </a:rPr>
-              <a:t>11 / 12</a:t>
+              <a:t>10 / 13</a:t>
             </a:r>
           </a:p>
         </p:txBody>
@@ -5501,23 +5184,101 @@
       <p:grpSpPr/>
       <p:sp>
         <p:nvSpPr>
-          <p:cNvPr id="2" name="Rectangle 1"/>
+          <p:cNvPr id="2" name="TextBox 1"/>
+          <p:cNvSpPr txBox="1"/>
+          <p:nvPr/>
+        </p:nvSpPr>
+        <p:spPr>
+          <a:xfrm>
+            <a:off x="822960" y="411480"/>
+            <a:ext cx="10058400" cy="365760"/>
+          </a:xfrm>
+          <a:prstGeom prst="rect">
+            <a:avLst/>
+          </a:prstGeom>
+          <a:noFill/>
+        </p:spPr>
+        <p:txBody>
+          <a:bodyPr wrap="square" anchor="t">
+            <a:spAutoFit/>
+          </a:bodyPr>
+          <a:lstStyle/>
+          <a:p>
+            <a:pPr algn="l">
+              <a:lnSpc>
+                <a:spcPct val="115000"/>
+              </a:lnSpc>
+            </a:pPr>
+            <a:r>
+              <a:rPr sz="1300" b="1">
+                <a:solidFill>
+                  <a:srgbClr val="2563EB"/>
+                </a:solidFill>
+              </a:rPr>
+              <a:t>KREDIBILITAS</a:t>
+            </a:r>
+          </a:p>
+        </p:txBody>
+      </p:sp>
+      <p:sp>
+        <p:nvSpPr>
+          <p:cNvPr id="3" name="TextBox 2"/>
+          <p:cNvSpPr txBox="1"/>
+          <p:nvPr/>
+        </p:nvSpPr>
+        <p:spPr>
+          <a:xfrm>
+            <a:off x="822960" y="777240"/>
+            <a:ext cx="10515600" cy="822960"/>
+          </a:xfrm>
+          <a:prstGeom prst="rect">
+            <a:avLst/>
+          </a:prstGeom>
+          <a:noFill/>
+        </p:spPr>
+        <p:txBody>
+          <a:bodyPr wrap="square" anchor="t">
+            <a:spAutoFit/>
+          </a:bodyPr>
+          <a:lstStyle/>
+          <a:p>
+            <a:pPr algn="l">
+              <a:lnSpc>
+                <a:spcPct val="115000"/>
+              </a:lnSpc>
+            </a:pPr>
+            <a:r>
+              <a:rPr sz="3400" b="1">
+                <a:solidFill>
+                  <a:srgbClr val="0F172A"/>
+                </a:solidFill>
+              </a:rPr>
+              <a:t>Kualitas &amp; Kepatuhan</a:t>
+            </a:r>
+          </a:p>
+        </p:txBody>
+      </p:sp>
+      <p:sp>
+        <p:nvSpPr>
+          <p:cNvPr id="4" name="Rectangle 3"/>
           <p:cNvSpPr/>
           <p:nvPr/>
         </p:nvSpPr>
         <p:spPr>
           <a:xfrm>
-            <a:off x="0" y="0"/>
-            <a:ext cx="12191695" cy="6858000"/>
+            <a:off x="822960" y="1920240"/>
+            <a:ext cx="-188126027100" cy="2926080"/>
           </a:xfrm>
           <a:prstGeom prst="rect">
             <a:avLst/>
           </a:prstGeom>
           <a:solidFill>
-            <a:srgbClr val="F1F5F9"/>
+            <a:srgbClr val="FFFFFF"/>
           </a:solidFill>
-          <a:ln>
-            <a:noFill/>
+          <a:ln w="12700">
+            <a:solidFill>
+              <a:srgbClr val="E2E8F0"/>
+            </a:solidFill>
           </a:ln>
         </p:spPr>
         <p:style>
@@ -5544,23 +5305,139 @@
       </p:sp>
       <p:sp>
         <p:nvSpPr>
-          <p:cNvPr id="3" name="Rectangle 2"/>
+          <p:cNvPr id="5" name="TextBox 4"/>
+          <p:cNvSpPr txBox="1"/>
+          <p:nvPr/>
+        </p:nvSpPr>
+        <p:spPr>
+          <a:xfrm>
+            <a:off x="1051560" y="2194560"/>
+            <a:ext cx="-188126484300" cy="548640"/>
+          </a:xfrm>
+          <a:prstGeom prst="rect">
+            <a:avLst/>
+          </a:prstGeom>
+          <a:noFill/>
+        </p:spPr>
+        <p:txBody>
+          <a:bodyPr wrap="square" anchor="t">
+            <a:spAutoFit/>
+          </a:bodyPr>
+          <a:lstStyle/>
+          <a:p>
+            <a:pPr algn="l">
+              <a:lnSpc>
+                <a:spcPct val="115000"/>
+              </a:lnSpc>
+            </a:pPr>
+            <a:r>
+              <a:rPr sz="2800" b="0">
+                <a:solidFill>
+                  <a:srgbClr val="0F172A"/>
+                </a:solidFill>
+              </a:rPr>
+              <a:t>✅</a:t>
+            </a:r>
+          </a:p>
+        </p:txBody>
+      </p:sp>
+      <p:sp>
+        <p:nvSpPr>
+          <p:cNvPr id="6" name="TextBox 5"/>
+          <p:cNvSpPr txBox="1"/>
+          <p:nvPr/>
+        </p:nvSpPr>
+        <p:spPr>
+          <a:xfrm>
+            <a:off x="1051560" y="2834640"/>
+            <a:ext cx="-188126484300" cy="548640"/>
+          </a:xfrm>
+          <a:prstGeom prst="rect">
+            <a:avLst/>
+          </a:prstGeom>
+          <a:noFill/>
+        </p:spPr>
+        <p:txBody>
+          <a:bodyPr wrap="square" anchor="t">
+            <a:spAutoFit/>
+          </a:bodyPr>
+          <a:lstStyle/>
+          <a:p>
+            <a:pPr algn="l">
+              <a:lnSpc>
+                <a:spcPct val="115000"/>
+              </a:lnSpc>
+            </a:pPr>
+            <a:r>
+              <a:rPr sz="1700" b="1">
+                <a:solidFill>
+                  <a:srgbClr val="0F172A"/>
+                </a:solidFill>
+              </a:rPr>
+              <a:t>±850 uji otomatis</a:t>
+            </a:r>
+          </a:p>
+        </p:txBody>
+      </p:sp>
+      <p:sp>
+        <p:nvSpPr>
+          <p:cNvPr id="7" name="TextBox 6"/>
+          <p:cNvSpPr txBox="1"/>
+          <p:nvPr/>
+        </p:nvSpPr>
+        <p:spPr>
+          <a:xfrm>
+            <a:off x="1051560" y="3337560"/>
+            <a:ext cx="-188126484300" cy="1371600"/>
+          </a:xfrm>
+          <a:prstGeom prst="rect">
+            <a:avLst/>
+          </a:prstGeom>
+          <a:noFill/>
+        </p:spPr>
+        <p:txBody>
+          <a:bodyPr wrap="square" anchor="t">
+            <a:spAutoFit/>
+          </a:bodyPr>
+          <a:lstStyle/>
+          <a:p>
+            <a:pPr algn="l">
+              <a:lnSpc>
+                <a:spcPct val="115000"/>
+              </a:lnSpc>
+            </a:pPr>
+            <a:r>
+              <a:rPr sz="1300" b="0">
+                <a:solidFill>
+                  <a:srgbClr val="64748B"/>
+                </a:solidFill>
+              </a:rPr>
+              <a:t>±700 backend (pytest) + 154 frontend (vitest) — diuji otomatis di CI tiap rilis</a:t>
+            </a:r>
+          </a:p>
+        </p:txBody>
+      </p:sp>
+      <p:sp>
+        <p:nvSpPr>
+          <p:cNvPr id="8" name="Rectangle 7"/>
           <p:cNvSpPr/>
           <p:nvPr/>
         </p:nvSpPr>
         <p:spPr>
           <a:xfrm>
-            <a:off x="0" y="0"/>
-            <a:ext cx="12191695" cy="109728"/>
+            <a:off x="-188124929820" y="1920240"/>
+            <a:ext cx="-188126027100" cy="2926080"/>
           </a:xfrm>
           <a:prstGeom prst="rect">
             <a:avLst/>
           </a:prstGeom>
           <a:solidFill>
-            <a:srgbClr val="2563EB"/>
+            <a:srgbClr val="FFFFFF"/>
           </a:solidFill>
-          <a:ln>
-            <a:noFill/>
+          <a:ln w="12700">
+            <a:solidFill>
+              <a:srgbClr val="E2E8F0"/>
+            </a:solidFill>
           </a:ln>
         </p:spPr>
         <p:style>
@@ -5587,14 +5464,14 @@
       </p:sp>
       <p:sp>
         <p:nvSpPr>
-          <p:cNvPr id="4" name="TextBox 3"/>
-          <p:cNvSpPr txBox="1"/>
-          <p:nvPr/>
-        </p:nvSpPr>
-        <p:spPr>
-          <a:xfrm>
-            <a:off x="822960" y="411480"/>
-            <a:ext cx="10058400" cy="365760"/>
+          <p:cNvPr id="9" name="TextBox 8"/>
+          <p:cNvSpPr txBox="1"/>
+          <p:nvPr/>
+        </p:nvSpPr>
+        <p:spPr>
+          <a:xfrm>
+            <a:off x="-188124701220" y="2194560"/>
+            <a:ext cx="-188126484300" cy="548640"/>
           </a:xfrm>
           <a:prstGeom prst="rect">
             <a:avLst/>
@@ -5613,26 +5490,26 @@
               </a:lnSpc>
             </a:pPr>
             <a:r>
-              <a:rPr sz="1300" b="1">
-                <a:solidFill>
-                  <a:srgbClr val="2563EB"/>
-                </a:solidFill>
-              </a:rPr>
-              <a:t>PENUTUP</a:t>
-            </a:r>
-          </a:p>
-        </p:txBody>
-      </p:sp>
-      <p:sp>
-        <p:nvSpPr>
-          <p:cNvPr id="5" name="TextBox 4"/>
-          <p:cNvSpPr txBox="1"/>
-          <p:nvPr/>
-        </p:nvSpPr>
-        <p:spPr>
-          <a:xfrm>
-            <a:off x="822960" y="777240"/>
-            <a:ext cx="10515600" cy="822960"/>
+              <a:rPr sz="2800" b="0">
+                <a:solidFill>
+                  <a:srgbClr val="0F172A"/>
+                </a:solidFill>
+              </a:rPr>
+              <a:t>🌐</a:t>
+            </a:r>
+          </a:p>
+        </p:txBody>
+      </p:sp>
+      <p:sp>
+        <p:nvSpPr>
+          <p:cNvPr id="10" name="TextBox 9"/>
+          <p:cNvSpPr txBox="1"/>
+          <p:nvPr/>
+        </p:nvSpPr>
+        <p:spPr>
+          <a:xfrm>
+            <a:off x="-188124701220" y="2834640"/>
+            <a:ext cx="-188126484300" cy="548640"/>
           </a:xfrm>
           <a:prstGeom prst="rect">
             <a:avLst/>
@@ -5651,26 +5528,26 @@
               </a:lnSpc>
             </a:pPr>
             <a:r>
-              <a:rPr sz="3400" b="1">
+              <a:rPr sz="1700" b="1">
                 <a:solidFill>
                   <a:srgbClr val="0F172A"/>
                 </a:solidFill>
               </a:rPr>
-              <a:t>Rangkuman &amp; Langkah Berikutnya</a:t>
-            </a:r>
-          </a:p>
-        </p:txBody>
-      </p:sp>
-      <p:sp>
-        <p:nvSpPr>
-          <p:cNvPr id="6" name="TextBox 5"/>
-          <p:cNvSpPr txBox="1"/>
-          <p:nvPr/>
-        </p:nvSpPr>
-        <p:spPr>
-          <a:xfrm>
-            <a:off x="822960" y="1920240"/>
-            <a:ext cx="10515600" cy="1280160"/>
+              <a:t>E2E di produksi</a:t>
+            </a:r>
+          </a:p>
+        </p:txBody>
+      </p:sp>
+      <p:sp>
+        <p:nvSpPr>
+          <p:cNvPr id="11" name="TextBox 10"/>
+          <p:cNvSpPr txBox="1"/>
+          <p:nvPr/>
+        </p:nvSpPr>
+        <p:spPr>
+          <a:xfrm>
+            <a:off x="-188124701220" y="3337560"/>
+            <a:ext cx="-188126484300" cy="1371600"/>
           </a:xfrm>
           <a:prstGeom prst="rect">
             <a:avLst/>
@@ -5689,111 +5566,37 @@
               </a:lnSpc>
             </a:pPr>
             <a:r>
-              <a:rPr sz="6400" b="1">
-                <a:solidFill>
-                  <a:srgbClr val="2563EB"/>
-                </a:solidFill>
-              </a:rPr>
-              <a:t>1  ·  0  ·  100%</a:t>
-            </a:r>
-          </a:p>
-        </p:txBody>
-      </p:sp>
-      <p:sp>
-        <p:nvSpPr>
-          <p:cNvPr id="7" name="TextBox 6"/>
-          <p:cNvSpPr txBox="1"/>
-          <p:nvPr/>
-        </p:nvSpPr>
-        <p:spPr>
-          <a:xfrm>
-            <a:off x="822960" y="3200400"/>
-            <a:ext cx="10515600" cy="640080"/>
-          </a:xfrm>
-          <a:prstGeom prst="rect">
-            <a:avLst/>
-          </a:prstGeom>
-          <a:noFill/>
-        </p:spPr>
-        <p:txBody>
-          <a:bodyPr wrap="square" anchor="t">
-            <a:spAutoFit/>
-          </a:bodyPr>
-          <a:lstStyle/>
-          <a:p>
-            <a:pPr algn="l">
-              <a:lnSpc>
-                <a:spcPct val="115000"/>
-              </a:lnSpc>
-            </a:pPr>
-            <a:r>
-              <a:rPr sz="1800" b="0">
+              <a:rPr sz="1300" b="0">
                 <a:solidFill>
                   <a:srgbClr val="64748B"/>
                 </a:solidFill>
               </a:rPr>
-              <a:t>1 aplikasi untuk semua peran · 0 kertas arsip manual · 100% tercatat &amp; bisa diaudit — setiap rupiah, setiap galon, setiap perjalanan.</a:t>
-            </a:r>
-          </a:p>
-        </p:txBody>
-      </p:sp>
-      <p:sp>
-        <p:nvSpPr>
-          <p:cNvPr id="8" name="TextBox 7"/>
-          <p:cNvSpPr txBox="1"/>
-          <p:nvPr/>
-        </p:nvSpPr>
-        <p:spPr>
-          <a:xfrm>
-            <a:off x="1005840" y="4023360"/>
-            <a:ext cx="10241280" cy="3474720"/>
-          </a:xfrm>
-          <a:prstGeom prst="rect">
-            <a:avLst/>
-          </a:prstGeom>
-          <a:noFill/>
-        </p:spPr>
-        <p:txBody>
-          <a:bodyPr wrap="square">
-            <a:spAutoFit/>
-          </a:bodyPr>
-          <a:lstStyle/>
-          <a:p>
-            <a:pPr>
-              <a:lnSpc>
-                <a:spcPct val="125000"/>
-              </a:lnSpc>
-            </a:pPr>
-            <a:r>
-              <a:rPr sz="1700">
-                <a:solidFill>
-                  <a:srgbClr val="64748B"/>
-                </a:solidFill>
-              </a:rPr>
-              <a:t>→  Langkah berikutnya: lengkapi data master (armada, driver, merk), pelatihan singkat per peran, dan prioritas pengembangan berikutnya.</a:t>
-            </a:r>
-          </a:p>
-        </p:txBody>
-      </p:sp>
-      <p:sp>
-        <p:nvSpPr>
-          <p:cNvPr id="9" name="Rectangle 8"/>
+              <a:t>Alur kritis diverifikasi di lingkungan nyata</a:t>
+            </a:r>
+          </a:p>
+        </p:txBody>
+      </p:sp>
+      <p:sp>
+        <p:nvSpPr>
+          <p:cNvPr id="12" name="Rectangle 11"/>
           <p:cNvSpPr/>
           <p:nvPr/>
         </p:nvSpPr>
         <p:spPr>
           <a:xfrm>
-            <a:off x="822960" y="5394960"/>
-            <a:ext cx="10515600" cy="868680"/>
+            <a:off x="-376250682600" y="1920240"/>
+            <a:ext cx="-188126027100" cy="2926080"/>
           </a:xfrm>
           <a:prstGeom prst="rect">
             <a:avLst/>
           </a:prstGeom>
           <a:solidFill>
-            <a:srgbClr val="EFF6FF"/>
+            <a:srgbClr val="FFFFFF"/>
           </a:solidFill>
-          <a:ln>
-            <a:noFill/>
+          <a:ln w="12700">
+            <a:solidFill>
+              <a:srgbClr val="E2E8F0"/>
+            </a:solidFill>
           </a:ln>
         </p:spPr>
         <p:style>
@@ -5820,7 +5623,323 @@
       </p:sp>
       <p:sp>
         <p:nvSpPr>
-          <p:cNvPr id="10" name="TextBox 9"/>
+          <p:cNvPr id="13" name="TextBox 12"/>
+          <p:cNvSpPr txBox="1"/>
+          <p:nvPr/>
+        </p:nvSpPr>
+        <p:spPr>
+          <a:xfrm>
+            <a:off x="-376250454000" y="2194560"/>
+            <a:ext cx="-188126484300" cy="548640"/>
+          </a:xfrm>
+          <a:prstGeom prst="rect">
+            <a:avLst/>
+          </a:prstGeom>
+          <a:noFill/>
+        </p:spPr>
+        <p:txBody>
+          <a:bodyPr wrap="square" anchor="t">
+            <a:spAutoFit/>
+          </a:bodyPr>
+          <a:lstStyle/>
+          <a:p>
+            <a:pPr algn="l">
+              <a:lnSpc>
+                <a:spcPct val="115000"/>
+              </a:lnSpc>
+            </a:pPr>
+            <a:r>
+              <a:rPr sz="2800" b="0">
+                <a:solidFill>
+                  <a:srgbClr val="0F172A"/>
+                </a:solidFill>
+              </a:rPr>
+              <a:t>📜</a:t>
+            </a:r>
+          </a:p>
+        </p:txBody>
+      </p:sp>
+      <p:sp>
+        <p:nvSpPr>
+          <p:cNvPr id="14" name="TextBox 13"/>
+          <p:cNvSpPr txBox="1"/>
+          <p:nvPr/>
+        </p:nvSpPr>
+        <p:spPr>
+          <a:xfrm>
+            <a:off x="-376250454000" y="2834640"/>
+            <a:ext cx="-188126484300" cy="548640"/>
+          </a:xfrm>
+          <a:prstGeom prst="rect">
+            <a:avLst/>
+          </a:prstGeom>
+          <a:noFill/>
+        </p:spPr>
+        <p:txBody>
+          <a:bodyPr wrap="square" anchor="t">
+            <a:spAutoFit/>
+          </a:bodyPr>
+          <a:lstStyle/>
+          <a:p>
+            <a:pPr algn="l">
+              <a:lnSpc>
+                <a:spcPct val="115000"/>
+              </a:lnSpc>
+            </a:pPr>
+            <a:r>
+              <a:rPr sz="1700" b="1">
+                <a:solidFill>
+                  <a:srgbClr val="0F172A"/>
+                </a:solidFill>
+              </a:rPr>
+              <a:t>Standar ISO</a:t>
+            </a:r>
+          </a:p>
+        </p:txBody>
+      </p:sp>
+      <p:sp>
+        <p:nvSpPr>
+          <p:cNvPr id="15" name="TextBox 14"/>
+          <p:cNvSpPr txBox="1"/>
+          <p:nvPr/>
+        </p:nvSpPr>
+        <p:spPr>
+          <a:xfrm>
+            <a:off x="-376250454000" y="3337560"/>
+            <a:ext cx="-188126484300" cy="1371600"/>
+          </a:xfrm>
+          <a:prstGeom prst="rect">
+            <a:avLst/>
+          </a:prstGeom>
+          <a:noFill/>
+        </p:spPr>
+        <p:txBody>
+          <a:bodyPr wrap="square" anchor="t">
+            <a:spAutoFit/>
+          </a:bodyPr>
+          <a:lstStyle/>
+          <a:p>
+            <a:pPr algn="l">
+              <a:lnSpc>
+                <a:spcPct val="115000"/>
+              </a:lnSpc>
+            </a:pPr>
+            <a:r>
+              <a:rPr sz="1300" b="0">
+                <a:solidFill>
+                  <a:srgbClr val="64748B"/>
+                </a:solidFill>
+              </a:rPr>
+              <a:t>27001 (keamanan) · 9241-11 (UX) · 9001 (mutu)</a:t>
+            </a:r>
+          </a:p>
+        </p:txBody>
+      </p:sp>
+      <p:sp>
+        <p:nvSpPr>
+          <p:cNvPr id="16" name="Rectangle 15"/>
+          <p:cNvSpPr/>
+          <p:nvPr/>
+        </p:nvSpPr>
+        <p:spPr>
+          <a:xfrm>
+            <a:off x="-564376435380" y="1920240"/>
+            <a:ext cx="-188126027100" cy="2926080"/>
+          </a:xfrm>
+          <a:prstGeom prst="rect">
+            <a:avLst/>
+          </a:prstGeom>
+          <a:solidFill>
+            <a:srgbClr val="FFFFFF"/>
+          </a:solidFill>
+          <a:ln w="12700">
+            <a:solidFill>
+              <a:srgbClr val="E2E8F0"/>
+            </a:solidFill>
+          </a:ln>
+        </p:spPr>
+        <p:style>
+          <a:lnRef idx="1">
+            <a:schemeClr val="accent1"/>
+          </a:lnRef>
+          <a:fillRef idx="3">
+            <a:schemeClr val="accent1"/>
+          </a:fillRef>
+          <a:effectRef idx="2">
+            <a:schemeClr val="accent1"/>
+          </a:effectRef>
+          <a:fontRef idx="minor">
+            <a:schemeClr val="lt1"/>
+          </a:fontRef>
+        </p:style>
+        <p:txBody>
+          <a:bodyPr rtlCol="0" anchor="ctr"/>
+          <a:lstStyle/>
+          <a:p>
+            <a:pPr algn="ctr"/>
+          </a:p>
+        </p:txBody>
+      </p:sp>
+      <p:sp>
+        <p:nvSpPr>
+          <p:cNvPr id="17" name="TextBox 16"/>
+          <p:cNvSpPr txBox="1"/>
+          <p:nvPr/>
+        </p:nvSpPr>
+        <p:spPr>
+          <a:xfrm>
+            <a:off x="-564376206780" y="2194560"/>
+            <a:ext cx="-188126484300" cy="548640"/>
+          </a:xfrm>
+          <a:prstGeom prst="rect">
+            <a:avLst/>
+          </a:prstGeom>
+          <a:noFill/>
+        </p:spPr>
+        <p:txBody>
+          <a:bodyPr wrap="square" anchor="t">
+            <a:spAutoFit/>
+          </a:bodyPr>
+          <a:lstStyle/>
+          <a:p>
+            <a:pPr algn="l">
+              <a:lnSpc>
+                <a:spcPct val="115000"/>
+              </a:lnSpc>
+            </a:pPr>
+            <a:r>
+              <a:rPr sz="2800" b="0">
+                <a:solidFill>
+                  <a:srgbClr val="0F172A"/>
+                </a:solidFill>
+              </a:rPr>
+              <a:t>♿</a:t>
+            </a:r>
+          </a:p>
+        </p:txBody>
+      </p:sp>
+      <p:sp>
+        <p:nvSpPr>
+          <p:cNvPr id="18" name="TextBox 17"/>
+          <p:cNvSpPr txBox="1"/>
+          <p:nvPr/>
+        </p:nvSpPr>
+        <p:spPr>
+          <a:xfrm>
+            <a:off x="-564376206780" y="2834640"/>
+            <a:ext cx="-188126484300" cy="548640"/>
+          </a:xfrm>
+          <a:prstGeom prst="rect">
+            <a:avLst/>
+          </a:prstGeom>
+          <a:noFill/>
+        </p:spPr>
+        <p:txBody>
+          <a:bodyPr wrap="square" anchor="t">
+            <a:spAutoFit/>
+          </a:bodyPr>
+          <a:lstStyle/>
+          <a:p>
+            <a:pPr algn="l">
+              <a:lnSpc>
+                <a:spcPct val="115000"/>
+              </a:lnSpc>
+            </a:pPr>
+            <a:r>
+              <a:rPr sz="1700" b="1">
+                <a:solidFill>
+                  <a:srgbClr val="0F172A"/>
+                </a:solidFill>
+              </a:rPr>
+              <a:t>Aksesibilitas</a:t>
+            </a:r>
+          </a:p>
+        </p:txBody>
+      </p:sp>
+      <p:sp>
+        <p:nvSpPr>
+          <p:cNvPr id="19" name="TextBox 18"/>
+          <p:cNvSpPr txBox="1"/>
+          <p:nvPr/>
+        </p:nvSpPr>
+        <p:spPr>
+          <a:xfrm>
+            <a:off x="-564376206780" y="3337560"/>
+            <a:ext cx="-188126484300" cy="1371600"/>
+          </a:xfrm>
+          <a:prstGeom prst="rect">
+            <a:avLst/>
+          </a:prstGeom>
+          <a:noFill/>
+        </p:spPr>
+        <p:txBody>
+          <a:bodyPr wrap="square" anchor="t">
+            <a:spAutoFit/>
+          </a:bodyPr>
+          <a:lstStyle/>
+          <a:p>
+            <a:pPr algn="l">
+              <a:lnSpc>
+                <a:spcPct val="115000"/>
+              </a:lnSpc>
+            </a:pPr>
+            <a:r>
+              <a:rPr sz="1300" b="0">
+                <a:solidFill>
+                  <a:srgbClr val="64748B"/>
+                </a:solidFill>
+              </a:rPr>
+              <a:t>Fokus keyboard, kontras ≥ 4,5:1, mode kontras tinggi &amp; gelap</a:t>
+            </a:r>
+          </a:p>
+        </p:txBody>
+      </p:sp>
+      <p:sp>
+        <p:nvSpPr>
+          <p:cNvPr id="20" name="Rectangle 19"/>
+          <p:cNvSpPr/>
+          <p:nvPr/>
+        </p:nvSpPr>
+        <p:spPr>
+          <a:xfrm>
+            <a:off x="822960" y="5394960"/>
+            <a:ext cx="10515600" cy="868680"/>
+          </a:xfrm>
+          <a:prstGeom prst="rect">
+            <a:avLst/>
+          </a:prstGeom>
+          <a:solidFill>
+            <a:srgbClr val="EFF6FF"/>
+          </a:solidFill>
+          <a:ln>
+            <a:noFill/>
+          </a:ln>
+        </p:spPr>
+        <p:style>
+          <a:lnRef idx="1">
+            <a:schemeClr val="accent1"/>
+          </a:lnRef>
+          <a:fillRef idx="3">
+            <a:schemeClr val="accent1"/>
+          </a:fillRef>
+          <a:effectRef idx="2">
+            <a:schemeClr val="accent1"/>
+          </a:effectRef>
+          <a:fontRef idx="minor">
+            <a:schemeClr val="lt1"/>
+          </a:fontRef>
+        </p:style>
+        <p:txBody>
+          <a:bodyPr rtlCol="0" anchor="ctr"/>
+          <a:lstStyle/>
+          <a:p>
+            <a:pPr algn="ctr"/>
+          </a:p>
+        </p:txBody>
+      </p:sp>
+      <p:sp>
+        <p:nvSpPr>
+          <p:cNvPr id="21" name="TextBox 20"/>
           <p:cNvSpPr txBox="1"/>
           <p:nvPr/>
         </p:nvSpPr>
@@ -5851,14 +5970,14 @@
                   <a:srgbClr val="0F172A"/>
                 </a:solidFill>
               </a:rPr>
-              <a:t>🙏  Terima kasih. Siap menjawab pertanyaan dan mendampingi penerapan.</a:t>
+              <a:t>🏆  Kunci: bukan prototipe — sistem yang diuji, diamankan, dan siap dipakai harian.</a:t>
             </a:r>
           </a:p>
         </p:txBody>
       </p:sp>
       <p:pic>
         <p:nvPicPr>
-          <p:cNvPr id="11" name="Picture 10" descr="bpf-badge.png"/>
+          <p:cNvPr id="22" name="Picture 21" descr="bpf-badge.png"/>
           <p:cNvPicPr>
             <a:picLocks noChangeAspect="1"/>
           </p:cNvPicPr>
@@ -5882,7 +6001,7 @@
       </p:pic>
       <p:sp>
         <p:nvSpPr>
-          <p:cNvPr id="12" name="TextBox 11"/>
+          <p:cNvPr id="23" name="TextBox 22"/>
           <p:cNvSpPr txBox="1"/>
           <p:nvPr/>
         </p:nvSpPr>
@@ -5913,7 +6032,444 @@
                   <a:srgbClr val="64748B"/>
                 </a:solidFill>
               </a:rPr>
-              <a:t>12 / 12</a:t>
+              <a:t>11 / 13</a:t>
+            </a:r>
+          </a:p>
+        </p:txBody>
+      </p:sp>
+    </p:spTree>
+  </p:cSld>
+  <p:clrMapOvr>
+    <a:masterClrMapping/>
+  </p:clrMapOvr>
+</p:sld>
+</file>
+
+<file path=ppt/slides/slide13.xml><?xml version="1.0" encoding="utf-8"?>
+<p:sld xmlns:a="http://schemas.openxmlformats.org/drawingml/2006/main" xmlns:p="http://schemas.openxmlformats.org/presentationml/2006/main" xmlns:r="http://schemas.openxmlformats.org/officeDocument/2006/relationships">
+  <p:cSld>
+    <p:spTree>
+      <p:nvGrpSpPr>
+        <p:cNvPr id="1" name=""/>
+        <p:cNvGrpSpPr/>
+        <p:nvPr/>
+      </p:nvGrpSpPr>
+      <p:grpSpPr/>
+      <p:sp>
+        <p:nvSpPr>
+          <p:cNvPr id="2" name="Rectangle 1"/>
+          <p:cNvSpPr/>
+          <p:nvPr/>
+        </p:nvSpPr>
+        <p:spPr>
+          <a:xfrm>
+            <a:off x="0" y="0"/>
+            <a:ext cx="12191695" cy="6858000"/>
+          </a:xfrm>
+          <a:prstGeom prst="rect">
+            <a:avLst/>
+          </a:prstGeom>
+          <a:solidFill>
+            <a:srgbClr val="F1F5F9"/>
+          </a:solidFill>
+          <a:ln>
+            <a:noFill/>
+          </a:ln>
+        </p:spPr>
+        <p:style>
+          <a:lnRef idx="1">
+            <a:schemeClr val="accent1"/>
+          </a:lnRef>
+          <a:fillRef idx="3">
+            <a:schemeClr val="accent1"/>
+          </a:fillRef>
+          <a:effectRef idx="2">
+            <a:schemeClr val="accent1"/>
+          </a:effectRef>
+          <a:fontRef idx="minor">
+            <a:schemeClr val="lt1"/>
+          </a:fontRef>
+        </p:style>
+        <p:txBody>
+          <a:bodyPr rtlCol="0" anchor="ctr"/>
+          <a:lstStyle/>
+          <a:p>
+            <a:pPr algn="ctr"/>
+          </a:p>
+        </p:txBody>
+      </p:sp>
+      <p:sp>
+        <p:nvSpPr>
+          <p:cNvPr id="3" name="Rectangle 2"/>
+          <p:cNvSpPr/>
+          <p:nvPr/>
+        </p:nvSpPr>
+        <p:spPr>
+          <a:xfrm>
+            <a:off x="0" y="0"/>
+            <a:ext cx="12191695" cy="109728"/>
+          </a:xfrm>
+          <a:prstGeom prst="rect">
+            <a:avLst/>
+          </a:prstGeom>
+          <a:solidFill>
+            <a:srgbClr val="2563EB"/>
+          </a:solidFill>
+          <a:ln>
+            <a:noFill/>
+          </a:ln>
+        </p:spPr>
+        <p:style>
+          <a:lnRef idx="1">
+            <a:schemeClr val="accent1"/>
+          </a:lnRef>
+          <a:fillRef idx="3">
+            <a:schemeClr val="accent1"/>
+          </a:fillRef>
+          <a:effectRef idx="2">
+            <a:schemeClr val="accent1"/>
+          </a:effectRef>
+          <a:fontRef idx="minor">
+            <a:schemeClr val="lt1"/>
+          </a:fontRef>
+        </p:style>
+        <p:txBody>
+          <a:bodyPr rtlCol="0" anchor="ctr"/>
+          <a:lstStyle/>
+          <a:p>
+            <a:pPr algn="ctr"/>
+          </a:p>
+        </p:txBody>
+      </p:sp>
+      <p:sp>
+        <p:nvSpPr>
+          <p:cNvPr id="4" name="TextBox 3"/>
+          <p:cNvSpPr txBox="1"/>
+          <p:nvPr/>
+        </p:nvSpPr>
+        <p:spPr>
+          <a:xfrm>
+            <a:off x="822960" y="411480"/>
+            <a:ext cx="10058400" cy="365760"/>
+          </a:xfrm>
+          <a:prstGeom prst="rect">
+            <a:avLst/>
+          </a:prstGeom>
+          <a:noFill/>
+        </p:spPr>
+        <p:txBody>
+          <a:bodyPr wrap="square" anchor="t">
+            <a:spAutoFit/>
+          </a:bodyPr>
+          <a:lstStyle/>
+          <a:p>
+            <a:pPr algn="l">
+              <a:lnSpc>
+                <a:spcPct val="115000"/>
+              </a:lnSpc>
+            </a:pPr>
+            <a:r>
+              <a:rPr sz="1300" b="1">
+                <a:solidFill>
+                  <a:srgbClr val="2563EB"/>
+                </a:solidFill>
+              </a:rPr>
+              <a:t>PENUTUP</a:t>
+            </a:r>
+          </a:p>
+        </p:txBody>
+      </p:sp>
+      <p:sp>
+        <p:nvSpPr>
+          <p:cNvPr id="5" name="TextBox 4"/>
+          <p:cNvSpPr txBox="1"/>
+          <p:nvPr/>
+        </p:nvSpPr>
+        <p:spPr>
+          <a:xfrm>
+            <a:off x="822960" y="777240"/>
+            <a:ext cx="10515600" cy="822960"/>
+          </a:xfrm>
+          <a:prstGeom prst="rect">
+            <a:avLst/>
+          </a:prstGeom>
+          <a:noFill/>
+        </p:spPr>
+        <p:txBody>
+          <a:bodyPr wrap="square" anchor="t">
+            <a:spAutoFit/>
+          </a:bodyPr>
+          <a:lstStyle/>
+          <a:p>
+            <a:pPr algn="l">
+              <a:lnSpc>
+                <a:spcPct val="115000"/>
+              </a:lnSpc>
+            </a:pPr>
+            <a:r>
+              <a:rPr sz="3400" b="1">
+                <a:solidFill>
+                  <a:srgbClr val="0F172A"/>
+                </a:solidFill>
+              </a:rPr>
+              <a:t>Rangkuman &amp; Langkah Berikutnya</a:t>
+            </a:r>
+          </a:p>
+        </p:txBody>
+      </p:sp>
+      <p:sp>
+        <p:nvSpPr>
+          <p:cNvPr id="6" name="TextBox 5"/>
+          <p:cNvSpPr txBox="1"/>
+          <p:nvPr/>
+        </p:nvSpPr>
+        <p:spPr>
+          <a:xfrm>
+            <a:off x="822960" y="1920240"/>
+            <a:ext cx="10515600" cy="1280160"/>
+          </a:xfrm>
+          <a:prstGeom prst="rect">
+            <a:avLst/>
+          </a:prstGeom>
+          <a:noFill/>
+        </p:spPr>
+        <p:txBody>
+          <a:bodyPr wrap="square" anchor="t">
+            <a:spAutoFit/>
+          </a:bodyPr>
+          <a:lstStyle/>
+          <a:p>
+            <a:pPr algn="l">
+              <a:lnSpc>
+                <a:spcPct val="115000"/>
+              </a:lnSpc>
+            </a:pPr>
+            <a:r>
+              <a:rPr sz="6400" b="1">
+                <a:solidFill>
+                  <a:srgbClr val="2563EB"/>
+                </a:solidFill>
+              </a:rPr>
+              <a:t>1  ·  0  ·  100%</a:t>
+            </a:r>
+          </a:p>
+        </p:txBody>
+      </p:sp>
+      <p:sp>
+        <p:nvSpPr>
+          <p:cNvPr id="7" name="TextBox 6"/>
+          <p:cNvSpPr txBox="1"/>
+          <p:nvPr/>
+        </p:nvSpPr>
+        <p:spPr>
+          <a:xfrm>
+            <a:off x="822960" y="3200400"/>
+            <a:ext cx="10515600" cy="640080"/>
+          </a:xfrm>
+          <a:prstGeom prst="rect">
+            <a:avLst/>
+          </a:prstGeom>
+          <a:noFill/>
+        </p:spPr>
+        <p:txBody>
+          <a:bodyPr wrap="square" anchor="t">
+            <a:spAutoFit/>
+          </a:bodyPr>
+          <a:lstStyle/>
+          <a:p>
+            <a:pPr algn="l">
+              <a:lnSpc>
+                <a:spcPct val="115000"/>
+              </a:lnSpc>
+            </a:pPr>
+            <a:r>
+              <a:rPr sz="1800" b="0">
+                <a:solidFill>
+                  <a:srgbClr val="64748B"/>
+                </a:solidFill>
+              </a:rPr>
+              <a:t>1 aplikasi untuk semua peran · 0 kertas arsip manual · 100% tercatat &amp; bisa diaudit — setiap rupiah, setiap galon, setiap perjalanan.</a:t>
+            </a:r>
+          </a:p>
+        </p:txBody>
+      </p:sp>
+      <p:sp>
+        <p:nvSpPr>
+          <p:cNvPr id="8" name="TextBox 7"/>
+          <p:cNvSpPr txBox="1"/>
+          <p:nvPr/>
+        </p:nvSpPr>
+        <p:spPr>
+          <a:xfrm>
+            <a:off x="1005840" y="4023360"/>
+            <a:ext cx="10241280" cy="3474720"/>
+          </a:xfrm>
+          <a:prstGeom prst="rect">
+            <a:avLst/>
+          </a:prstGeom>
+          <a:noFill/>
+        </p:spPr>
+        <p:txBody>
+          <a:bodyPr wrap="square">
+            <a:spAutoFit/>
+          </a:bodyPr>
+          <a:lstStyle/>
+          <a:p>
+            <a:pPr>
+              <a:lnSpc>
+                <a:spcPct val="125000"/>
+              </a:lnSpc>
+            </a:pPr>
+            <a:r>
+              <a:rPr sz="1700">
+                <a:solidFill>
+                  <a:srgbClr val="64748B"/>
+                </a:solidFill>
+              </a:rPr>
+              <a:t>→  Langkah berikutnya: lengkapi data master (armada, driver, merk), pelatihan singkat per peran, dan prioritas pengembangan berikutnya.</a:t>
+            </a:r>
+          </a:p>
+        </p:txBody>
+      </p:sp>
+      <p:sp>
+        <p:nvSpPr>
+          <p:cNvPr id="9" name="Rectangle 8"/>
+          <p:cNvSpPr/>
+          <p:nvPr/>
+        </p:nvSpPr>
+        <p:spPr>
+          <a:xfrm>
+            <a:off x="822960" y="5394960"/>
+            <a:ext cx="10515600" cy="868680"/>
+          </a:xfrm>
+          <a:prstGeom prst="rect">
+            <a:avLst/>
+          </a:prstGeom>
+          <a:solidFill>
+            <a:srgbClr val="EFF6FF"/>
+          </a:solidFill>
+          <a:ln>
+            <a:noFill/>
+          </a:ln>
+        </p:spPr>
+        <p:style>
+          <a:lnRef idx="1">
+            <a:schemeClr val="accent1"/>
+          </a:lnRef>
+          <a:fillRef idx="3">
+            <a:schemeClr val="accent1"/>
+          </a:fillRef>
+          <a:effectRef idx="2">
+            <a:schemeClr val="accent1"/>
+          </a:effectRef>
+          <a:fontRef idx="minor">
+            <a:schemeClr val="lt1"/>
+          </a:fontRef>
+        </p:style>
+        <p:txBody>
+          <a:bodyPr rtlCol="0" anchor="ctr"/>
+          <a:lstStyle/>
+          <a:p>
+            <a:pPr algn="ctr"/>
+          </a:p>
+        </p:txBody>
+      </p:sp>
+      <p:sp>
+        <p:nvSpPr>
+          <p:cNvPr id="10" name="TextBox 9"/>
+          <p:cNvSpPr txBox="1"/>
+          <p:nvPr/>
+        </p:nvSpPr>
+        <p:spPr>
+          <a:xfrm>
+            <a:off x="1051560" y="5559552"/>
+            <a:ext cx="10058400" cy="640080"/>
+          </a:xfrm>
+          <a:prstGeom prst="rect">
+            <a:avLst/>
+          </a:prstGeom>
+          <a:noFill/>
+        </p:spPr>
+        <p:txBody>
+          <a:bodyPr wrap="square" anchor="ctr">
+            <a:spAutoFit/>
+          </a:bodyPr>
+          <a:lstStyle/>
+          <a:p>
+            <a:pPr algn="l">
+              <a:lnSpc>
+                <a:spcPct val="115000"/>
+              </a:lnSpc>
+            </a:pPr>
+            <a:r>
+              <a:rPr sz="1600" b="1">
+                <a:solidFill>
+                  <a:srgbClr val="0F172A"/>
+                </a:solidFill>
+              </a:rPr>
+              <a:t>🙏  Terima kasih. Siap menjawab pertanyaan dan mendampingi penerapan.</a:t>
+            </a:r>
+          </a:p>
+        </p:txBody>
+      </p:sp>
+      <p:pic>
+        <p:nvPicPr>
+          <p:cNvPr id="11" name="Picture 10" descr="bpf-badge.png"/>
+          <p:cNvPicPr>
+            <a:picLocks noChangeAspect="1"/>
+          </p:cNvPicPr>
+          <p:nvPr/>
+        </p:nvPicPr>
+        <p:blipFill>
+          <a:blip r:embed="rId2"/>
+          <a:stretch>
+            <a:fillRect/>
+          </a:stretch>
+        </p:blipFill>
+        <p:spPr>
+          <a:xfrm>
+            <a:off x="274320" y="6355080"/>
+            <a:ext cx="457200" cy="457200"/>
+          </a:xfrm>
+          <a:prstGeom prst="rect">
+            <a:avLst/>
+          </a:prstGeom>
+        </p:spPr>
+      </p:pic>
+      <p:sp>
+        <p:nvSpPr>
+          <p:cNvPr id="12" name="TextBox 11"/>
+          <p:cNvSpPr txBox="1"/>
+          <p:nvPr/>
+        </p:nvSpPr>
+        <p:spPr>
+          <a:xfrm>
+            <a:off x="10881360" y="6446520"/>
+            <a:ext cx="1097280" cy="320040"/>
+          </a:xfrm>
+          <a:prstGeom prst="rect">
+            <a:avLst/>
+          </a:prstGeom>
+          <a:noFill/>
+        </p:spPr>
+        <p:txBody>
+          <a:bodyPr wrap="square" anchor="t">
+            <a:spAutoFit/>
+          </a:bodyPr>
+          <a:lstStyle/>
+          <a:p>
+            <a:pPr algn="r">
+              <a:lnSpc>
+                <a:spcPct val="115000"/>
+              </a:lnSpc>
+            </a:pPr>
+            <a:r>
+              <a:rPr sz="1100" b="0">
+                <a:solidFill>
+                  <a:srgbClr val="64748B"/>
+                </a:solidFill>
+              </a:rPr>
+              <a:t>12 / 13</a:t>
             </a:r>
           </a:p>
         </p:txBody>
@@ -6233,7 +6789,7 @@
                   <a:srgbClr val="64748B"/>
                 </a:solidFill>
               </a:rPr>
-              <a:t>2 / 12</a:t>
+              <a:t>2 / 13</a:t>
             </a:r>
           </a:p>
         </p:txBody>
@@ -6392,7 +6948,7 @@
                 <a:gridCol w="3840480"/>
                 <a:gridCol w="6675120"/>
               </a:tblGrid>
-              <a:tr h="418011">
+              <a:tr h="365760">
                 <a:tc>
                   <a:txBody>
                     <a:bodyPr/>
@@ -6446,7 +7002,7 @@
                   </a:tcPr>
                 </a:tc>
               </a:tr>
-              <a:tr h="418011">
+              <a:tr h="365760">
                 <a:tc>
                   <a:txBody>
                     <a:bodyPr/>
@@ -6500,7 +7056,7 @@
                   </a:tcPr>
                 </a:tc>
               </a:tr>
-              <a:tr h="418011">
+              <a:tr h="365760">
                 <a:tc>
                   <a:txBody>
                     <a:bodyPr/>
@@ -6554,7 +7110,7 @@
                   </a:tcPr>
                 </a:tc>
               </a:tr>
-              <a:tr h="418011">
+              <a:tr h="365760">
                 <a:tc>
                   <a:txBody>
                     <a:bodyPr/>
@@ -6608,7 +7164,7 @@
                   </a:tcPr>
                 </a:tc>
               </a:tr>
-              <a:tr h="418011">
+              <a:tr h="365760">
                 <a:tc>
                   <a:txBody>
                     <a:bodyPr/>
@@ -6662,7 +7218,7 @@
                   </a:tcPr>
                 </a:tc>
               </a:tr>
-              <a:tr h="418011">
+              <a:tr h="365760">
                 <a:tc>
                   <a:txBody>
                     <a:bodyPr/>
@@ -6705,7 +7261,7 @@
                             <a:srgbClr val="64748B"/>
                           </a:solidFill>
                         </a:rPr>
-                        <a:t>Halaman Air Minum</a:t>
+                        <a:t>Halaman Air Minum + Overtime Saya</a:t>
                       </a:r>
                     </a:p>
                   </a:txBody>
@@ -6716,7 +7272,61 @@
                   </a:tcPr>
                 </a:tc>
               </a:tr>
-              <a:tr h="418014">
+              <a:tr h="365760">
+                <a:tc>
+                  <a:txBody>
+                    <a:bodyPr/>
+                    <a:lstStyle/>
+                    <a:p>
+                      <a:pPr>
+                        <a:lnSpc>
+                          <a:spcPct val="100000"/>
+                        </a:lnSpc>
+                      </a:pPr>
+                      <a:r>
+                        <a:rPr sz="1400" b="1">
+                          <a:solidFill>
+                            <a:srgbClr val="0F172A"/>
+                          </a:solidFill>
+                        </a:rPr>
+                        <a:t>Security</a:t>
+                      </a:r>
+                    </a:p>
+                  </a:txBody>
+                  <a:tcPr marL="73152" marR="73152" marT="27432" marB="27432" anchor="ctr">
+                    <a:solidFill>
+                      <a:srgbClr val="FFFFFF"/>
+                    </a:solidFill>
+                  </a:tcPr>
+                </a:tc>
+                <a:tc>
+                  <a:txBody>
+                    <a:bodyPr/>
+                    <a:lstStyle/>
+                    <a:p>
+                      <a:pPr>
+                        <a:lnSpc>
+                          <a:spcPct val="100000"/>
+                        </a:lnSpc>
+                      </a:pPr>
+                      <a:r>
+                        <a:rPr sz="1400" b="0">
+                          <a:solidFill>
+                            <a:srgbClr val="64748B"/>
+                          </a:solidFill>
+                        </a:rPr>
+                        <a:t>Overtime Saya — pengajuan lembur dgn foto bukti</a:t>
+                      </a:r>
+                    </a:p>
+                  </a:txBody>
+                  <a:tcPr marL="73152" marR="73152" marT="27432" marB="27432" anchor="ctr">
+                    <a:solidFill>
+                      <a:srgbClr val="FFFFFF"/>
+                    </a:solidFill>
+                  </a:tcPr>
+                </a:tc>
+              </a:tr>
+              <a:tr h="365760">
                 <a:tc>
                   <a:txBody>
                     <a:bodyPr/>
@@ -6912,7 +7522,7 @@
                   <a:srgbClr val="64748B"/>
                 </a:solidFill>
               </a:rPr>
-              <a:t>3 / 12</a:t>
+              <a:t>3 / 13</a:t>
             </a:r>
           </a:p>
         </p:txBody>
@@ -7679,7 +8289,7 @@
                   <a:srgbClr val="64748B"/>
                 </a:solidFill>
               </a:rPr>
-              <a:t>4 / 12</a:t>
+              <a:t>4 / 13</a:t>
             </a:r>
           </a:p>
         </p:txBody>
@@ -8211,7 +8821,7 @@
                   <a:srgbClr val="64748B"/>
                 </a:solidFill>
               </a:rPr>
-              <a:t>5 / 12</a:t>
+              <a:t>5 / 13</a:t>
             </a:r>
           </a:p>
         </p:txBody>
@@ -8268,6 +8878,917 @@
                 </a:solidFill>
               </a:rPr>
               <a:t>DEMO UTAMA 3</a:t>
+            </a:r>
+          </a:p>
+        </p:txBody>
+      </p:sp>
+      <p:sp>
+        <p:nvSpPr>
+          <p:cNvPr id="3" name="TextBox 2"/>
+          <p:cNvSpPr txBox="1"/>
+          <p:nvPr/>
+        </p:nvSpPr>
+        <p:spPr>
+          <a:xfrm>
+            <a:off x="822960" y="777240"/>
+            <a:ext cx="10515600" cy="822960"/>
+          </a:xfrm>
+          <a:prstGeom prst="rect">
+            <a:avLst/>
+          </a:prstGeom>
+          <a:noFill/>
+        </p:spPr>
+        <p:txBody>
+          <a:bodyPr wrap="square" anchor="t">
+            <a:spAutoFit/>
+          </a:bodyPr>
+          <a:lstStyle/>
+          <a:p>
+            <a:pPr algn="l">
+              <a:lnSpc>
+                <a:spcPct val="115000"/>
+              </a:lnSpc>
+            </a:pPr>
+            <a:r>
+              <a:rPr sz="3400" b="1">
+                <a:solidFill>
+                  <a:srgbClr val="0F172A"/>
+                </a:solidFill>
+              </a:rPr>
+              <a:t>Overtime &amp; ACC Berjenjang</a:t>
+            </a:r>
+          </a:p>
+        </p:txBody>
+      </p:sp>
+      <p:sp>
+        <p:nvSpPr>
+          <p:cNvPr id="4" name="TextBox 3"/>
+          <p:cNvSpPr txBox="1"/>
+          <p:nvPr/>
+        </p:nvSpPr>
+        <p:spPr>
+          <a:xfrm>
+            <a:off x="822960" y="1554480"/>
+            <a:ext cx="10515600" cy="457200"/>
+          </a:xfrm>
+          <a:prstGeom prst="rect">
+            <a:avLst/>
+          </a:prstGeom>
+          <a:noFill/>
+        </p:spPr>
+        <p:txBody>
+          <a:bodyPr wrap="square" anchor="t">
+            <a:spAutoFit/>
+          </a:bodyPr>
+          <a:lstStyle/>
+          <a:p>
+            <a:pPr algn="l">
+              <a:lnSpc>
+                <a:spcPct val="115000"/>
+              </a:lnSpc>
+            </a:pPr>
+            <a:r>
+              <a:rPr sz="1800" b="0">
+                <a:solidFill>
+                  <a:srgbClr val="64748B"/>
+                </a:solidFill>
+              </a:rPr>
+              <a:t>Google Form untuk lembur tidak dipakai lagi — semuanya dari dalam aplikasi, dengan bukti foto.</a:t>
+            </a:r>
+          </a:p>
+        </p:txBody>
+      </p:sp>
+      <p:sp>
+        <p:nvSpPr>
+          <p:cNvPr id="5" name="Rectangle 4"/>
+          <p:cNvSpPr/>
+          <p:nvPr/>
+        </p:nvSpPr>
+        <p:spPr>
+          <a:xfrm>
+            <a:off x="822960" y="2148840"/>
+            <a:ext cx="-188126027100" cy="2926080"/>
+          </a:xfrm>
+          <a:prstGeom prst="rect">
+            <a:avLst/>
+          </a:prstGeom>
+          <a:solidFill>
+            <a:srgbClr val="FFFFFF"/>
+          </a:solidFill>
+          <a:ln w="12700">
+            <a:solidFill>
+              <a:srgbClr val="E2E8F0"/>
+            </a:solidFill>
+          </a:ln>
+        </p:spPr>
+        <p:style>
+          <a:lnRef idx="1">
+            <a:schemeClr val="accent1"/>
+          </a:lnRef>
+          <a:fillRef idx="3">
+            <a:schemeClr val="accent1"/>
+          </a:fillRef>
+          <a:effectRef idx="2">
+            <a:schemeClr val="accent1"/>
+          </a:effectRef>
+          <a:fontRef idx="minor">
+            <a:schemeClr val="lt1"/>
+          </a:fontRef>
+        </p:style>
+        <p:txBody>
+          <a:bodyPr rtlCol="0" anchor="ctr"/>
+          <a:lstStyle/>
+          <a:p>
+            <a:pPr algn="ctr"/>
+          </a:p>
+        </p:txBody>
+      </p:sp>
+      <p:sp>
+        <p:nvSpPr>
+          <p:cNvPr id="6" name="TextBox 5"/>
+          <p:cNvSpPr txBox="1"/>
+          <p:nvPr/>
+        </p:nvSpPr>
+        <p:spPr>
+          <a:xfrm>
+            <a:off x="1051560" y="2423160"/>
+            <a:ext cx="-188126484300" cy="548640"/>
+          </a:xfrm>
+          <a:prstGeom prst="rect">
+            <a:avLst/>
+          </a:prstGeom>
+          <a:noFill/>
+        </p:spPr>
+        <p:txBody>
+          <a:bodyPr wrap="square" anchor="t">
+            <a:spAutoFit/>
+          </a:bodyPr>
+          <a:lstStyle/>
+          <a:p>
+            <a:pPr algn="l">
+              <a:lnSpc>
+                <a:spcPct val="115000"/>
+              </a:lnSpc>
+            </a:pPr>
+            <a:r>
+              <a:rPr sz="2800" b="0">
+                <a:solidFill>
+                  <a:srgbClr val="0F172A"/>
+                </a:solidFill>
+              </a:rPr>
+              <a:t>📸</a:t>
+            </a:r>
+          </a:p>
+        </p:txBody>
+      </p:sp>
+      <p:sp>
+        <p:nvSpPr>
+          <p:cNvPr id="7" name="TextBox 6"/>
+          <p:cNvSpPr txBox="1"/>
+          <p:nvPr/>
+        </p:nvSpPr>
+        <p:spPr>
+          <a:xfrm>
+            <a:off x="1051560" y="3063240"/>
+            <a:ext cx="-188126484300" cy="548640"/>
+          </a:xfrm>
+          <a:prstGeom prst="rect">
+            <a:avLst/>
+          </a:prstGeom>
+          <a:noFill/>
+        </p:spPr>
+        <p:txBody>
+          <a:bodyPr wrap="square" anchor="t">
+            <a:spAutoFit/>
+          </a:bodyPr>
+          <a:lstStyle/>
+          <a:p>
+            <a:pPr algn="l">
+              <a:lnSpc>
+                <a:spcPct val="115000"/>
+              </a:lnSpc>
+            </a:pPr>
+            <a:r>
+              <a:rPr sz="1700" b="1">
+                <a:solidFill>
+                  <a:srgbClr val="0F172A"/>
+                </a:solidFill>
+              </a:rPr>
+              <a:t>Submit dgn foto bukti</a:t>
+            </a:r>
+          </a:p>
+        </p:txBody>
+      </p:sp>
+      <p:sp>
+        <p:nvSpPr>
+          <p:cNvPr id="8" name="TextBox 7"/>
+          <p:cNvSpPr txBox="1"/>
+          <p:nvPr/>
+        </p:nvSpPr>
+        <p:spPr>
+          <a:xfrm>
+            <a:off x="1051560" y="3566160"/>
+            <a:ext cx="-188126484300" cy="1371600"/>
+          </a:xfrm>
+          <a:prstGeom prst="rect">
+            <a:avLst/>
+          </a:prstGeom>
+          <a:noFill/>
+        </p:spPr>
+        <p:txBody>
+          <a:bodyPr wrap="square" anchor="t">
+            <a:spAutoFit/>
+          </a:bodyPr>
+          <a:lstStyle/>
+          <a:p>
+            <a:pPr algn="l">
+              <a:lnSpc>
+                <a:spcPct val="115000"/>
+              </a:lnSpc>
+            </a:pPr>
+            <a:r>
+              <a:rPr sz="1300" b="0">
+                <a:solidFill>
+                  <a:srgbClr val="64748B"/>
+                </a:solidFill>
+              </a:rPr>
+              <a:t>Driver (PWA), OB &amp; Security — nama &amp; posisi otomatis dari akun; foto mulai &amp; selesai + watermark &amp; GPS</a:t>
+            </a:r>
+          </a:p>
+        </p:txBody>
+      </p:sp>
+      <p:sp>
+        <p:nvSpPr>
+          <p:cNvPr id="9" name="Rectangle 8"/>
+          <p:cNvSpPr/>
+          <p:nvPr/>
+        </p:nvSpPr>
+        <p:spPr>
+          <a:xfrm>
+            <a:off x="-188124929820" y="2148840"/>
+            <a:ext cx="-188126027100" cy="2926080"/>
+          </a:xfrm>
+          <a:prstGeom prst="rect">
+            <a:avLst/>
+          </a:prstGeom>
+          <a:solidFill>
+            <a:srgbClr val="FFFFFF"/>
+          </a:solidFill>
+          <a:ln w="12700">
+            <a:solidFill>
+              <a:srgbClr val="E2E8F0"/>
+            </a:solidFill>
+          </a:ln>
+        </p:spPr>
+        <p:style>
+          <a:lnRef idx="1">
+            <a:schemeClr val="accent1"/>
+          </a:lnRef>
+          <a:fillRef idx="3">
+            <a:schemeClr val="accent1"/>
+          </a:fillRef>
+          <a:effectRef idx="2">
+            <a:schemeClr val="accent1"/>
+          </a:effectRef>
+          <a:fontRef idx="minor">
+            <a:schemeClr val="lt1"/>
+          </a:fontRef>
+        </p:style>
+        <p:txBody>
+          <a:bodyPr rtlCol="0" anchor="ctr"/>
+          <a:lstStyle/>
+          <a:p>
+            <a:pPr algn="ctr"/>
+          </a:p>
+        </p:txBody>
+      </p:sp>
+      <p:sp>
+        <p:nvSpPr>
+          <p:cNvPr id="10" name="TextBox 9"/>
+          <p:cNvSpPr txBox="1"/>
+          <p:nvPr/>
+        </p:nvSpPr>
+        <p:spPr>
+          <a:xfrm>
+            <a:off x="-188124701220" y="2423160"/>
+            <a:ext cx="-188126484300" cy="548640"/>
+          </a:xfrm>
+          <a:prstGeom prst="rect">
+            <a:avLst/>
+          </a:prstGeom>
+          <a:noFill/>
+        </p:spPr>
+        <p:txBody>
+          <a:bodyPr wrap="square" anchor="t">
+            <a:spAutoFit/>
+          </a:bodyPr>
+          <a:lstStyle/>
+          <a:p>
+            <a:pPr algn="l">
+              <a:lnSpc>
+                <a:spcPct val="115000"/>
+              </a:lnSpc>
+            </a:pPr>
+            <a:r>
+              <a:rPr sz="2800" b="0">
+                <a:solidFill>
+                  <a:srgbClr val="0F172A"/>
+                </a:solidFill>
+              </a:rPr>
+              <a:t>⏳</a:t>
+            </a:r>
+          </a:p>
+        </p:txBody>
+      </p:sp>
+      <p:sp>
+        <p:nvSpPr>
+          <p:cNvPr id="11" name="TextBox 10"/>
+          <p:cNvSpPr txBox="1"/>
+          <p:nvPr/>
+        </p:nvSpPr>
+        <p:spPr>
+          <a:xfrm>
+            <a:off x="-188124701220" y="3063240"/>
+            <a:ext cx="-188126484300" cy="548640"/>
+          </a:xfrm>
+          <a:prstGeom prst="rect">
+            <a:avLst/>
+          </a:prstGeom>
+          <a:noFill/>
+        </p:spPr>
+        <p:txBody>
+          <a:bodyPr wrap="square" anchor="t">
+            <a:spAutoFit/>
+          </a:bodyPr>
+          <a:lstStyle/>
+          <a:p>
+            <a:pPr algn="l">
+              <a:lnSpc>
+                <a:spcPct val="115000"/>
+              </a:lnSpc>
+            </a:pPr>
+            <a:r>
+              <a:rPr sz="1700" b="1">
+                <a:solidFill>
+                  <a:srgbClr val="0F172A"/>
+                </a:solidFill>
+              </a:rPr>
+              <a:t>Batas waktu bisa diatur</a:t>
+            </a:r>
+          </a:p>
+        </p:txBody>
+      </p:sp>
+      <p:sp>
+        <p:nvSpPr>
+          <p:cNvPr id="12" name="TextBox 11"/>
+          <p:cNvSpPr txBox="1"/>
+          <p:nvPr/>
+        </p:nvSpPr>
+        <p:spPr>
+          <a:xfrm>
+            <a:off x="-188124701220" y="3566160"/>
+            <a:ext cx="-188126484300" cy="1371600"/>
+          </a:xfrm>
+          <a:prstGeom prst="rect">
+            <a:avLst/>
+          </a:prstGeom>
+          <a:noFill/>
+        </p:spPr>
+        <p:txBody>
+          <a:bodyPr wrap="square" anchor="t">
+            <a:spAutoFit/>
+          </a:bodyPr>
+          <a:lstStyle/>
+          <a:p>
+            <a:pPr algn="l">
+              <a:lnSpc>
+                <a:spcPct val="115000"/>
+              </a:lnSpc>
+            </a:pPr>
+            <a:r>
+              <a:rPr sz="1300" b="0">
+                <a:solidFill>
+                  <a:srgbClr val="64748B"/>
+                </a:solidFill>
+              </a:rPr>
+              <a:t>Default 24 jam — terlambat tetap diterima, diberi tanda ⏳ di daftar GA HR (transparan)</a:t>
+            </a:r>
+          </a:p>
+        </p:txBody>
+      </p:sp>
+      <p:sp>
+        <p:nvSpPr>
+          <p:cNvPr id="13" name="Rectangle 12"/>
+          <p:cNvSpPr/>
+          <p:nvPr/>
+        </p:nvSpPr>
+        <p:spPr>
+          <a:xfrm>
+            <a:off x="-376250682600" y="2148840"/>
+            <a:ext cx="-188126027100" cy="2926080"/>
+          </a:xfrm>
+          <a:prstGeom prst="rect">
+            <a:avLst/>
+          </a:prstGeom>
+          <a:solidFill>
+            <a:srgbClr val="FFFFFF"/>
+          </a:solidFill>
+          <a:ln w="12700">
+            <a:solidFill>
+              <a:srgbClr val="E2E8F0"/>
+            </a:solidFill>
+          </a:ln>
+        </p:spPr>
+        <p:style>
+          <a:lnRef idx="1">
+            <a:schemeClr val="accent1"/>
+          </a:lnRef>
+          <a:fillRef idx="3">
+            <a:schemeClr val="accent1"/>
+          </a:fillRef>
+          <a:effectRef idx="2">
+            <a:schemeClr val="accent1"/>
+          </a:effectRef>
+          <a:fontRef idx="minor">
+            <a:schemeClr val="lt1"/>
+          </a:fontRef>
+        </p:style>
+        <p:txBody>
+          <a:bodyPr rtlCol="0" anchor="ctr"/>
+          <a:lstStyle/>
+          <a:p>
+            <a:pPr algn="ctr"/>
+          </a:p>
+        </p:txBody>
+      </p:sp>
+      <p:sp>
+        <p:nvSpPr>
+          <p:cNvPr id="14" name="TextBox 13"/>
+          <p:cNvSpPr txBox="1"/>
+          <p:nvPr/>
+        </p:nvSpPr>
+        <p:spPr>
+          <a:xfrm>
+            <a:off x="-376250454000" y="2423160"/>
+            <a:ext cx="-188126484300" cy="548640"/>
+          </a:xfrm>
+          <a:prstGeom prst="rect">
+            <a:avLst/>
+          </a:prstGeom>
+          <a:noFill/>
+        </p:spPr>
+        <p:txBody>
+          <a:bodyPr wrap="square" anchor="t">
+            <a:spAutoFit/>
+          </a:bodyPr>
+          <a:lstStyle/>
+          <a:p>
+            <a:pPr algn="l">
+              <a:lnSpc>
+                <a:spcPct val="115000"/>
+              </a:lnSpc>
+            </a:pPr>
+            <a:r>
+              <a:rPr sz="2800" b="0">
+                <a:solidFill>
+                  <a:srgbClr val="0F172A"/>
+                </a:solidFill>
+              </a:rPr>
+              <a:t>✅</a:t>
+            </a:r>
+          </a:p>
+        </p:txBody>
+      </p:sp>
+      <p:sp>
+        <p:nvSpPr>
+          <p:cNvPr id="15" name="TextBox 14"/>
+          <p:cNvSpPr txBox="1"/>
+          <p:nvPr/>
+        </p:nvSpPr>
+        <p:spPr>
+          <a:xfrm>
+            <a:off x="-376250454000" y="3063240"/>
+            <a:ext cx="-188126484300" cy="548640"/>
+          </a:xfrm>
+          <a:prstGeom prst="rect">
+            <a:avLst/>
+          </a:prstGeom>
+          <a:noFill/>
+        </p:spPr>
+        <p:txBody>
+          <a:bodyPr wrap="square" anchor="t">
+            <a:spAutoFit/>
+          </a:bodyPr>
+          <a:lstStyle/>
+          <a:p>
+            <a:pPr algn="l">
+              <a:lnSpc>
+                <a:spcPct val="115000"/>
+              </a:lnSpc>
+            </a:pPr>
+            <a:r>
+              <a:rPr sz="1700" b="1">
+                <a:solidFill>
+                  <a:srgbClr val="0F172A"/>
+                </a:solidFill>
+              </a:rPr>
+              <a:t>ACC berjenjang</a:t>
+            </a:r>
+          </a:p>
+        </p:txBody>
+      </p:sp>
+      <p:sp>
+        <p:nvSpPr>
+          <p:cNvPr id="16" name="TextBox 15"/>
+          <p:cNvSpPr txBox="1"/>
+          <p:nvPr/>
+        </p:nvSpPr>
+        <p:spPr>
+          <a:xfrm>
+            <a:off x="-376250454000" y="3566160"/>
+            <a:ext cx="-188126484300" cy="1371600"/>
+          </a:xfrm>
+          <a:prstGeom prst="rect">
+            <a:avLst/>
+          </a:prstGeom>
+          <a:noFill/>
+        </p:spPr>
+        <p:txBody>
+          <a:bodyPr wrap="square" anchor="t">
+            <a:spAutoFit/>
+          </a:bodyPr>
+          <a:lstStyle/>
+          <a:p>
+            <a:pPr algn="l">
+              <a:lnSpc>
+                <a:spcPct val="115000"/>
+              </a:lnSpc>
+            </a:pPr>
+            <a:r>
+              <a:rPr sz="1300" b="0">
+                <a:solidFill>
+                  <a:srgbClr val="64748B"/>
+                </a:solidFill>
+              </a:rPr>
+              <a:t>GA HR → Admin — data terkunci selama menunggu; penolakan wajib beralasan; tercatat di audit log</a:t>
+            </a:r>
+          </a:p>
+        </p:txBody>
+      </p:sp>
+      <p:sp>
+        <p:nvSpPr>
+          <p:cNvPr id="17" name="Rectangle 16"/>
+          <p:cNvSpPr/>
+          <p:nvPr/>
+        </p:nvSpPr>
+        <p:spPr>
+          <a:xfrm>
+            <a:off x="-564376435380" y="2148840"/>
+            <a:ext cx="-188126027100" cy="2926080"/>
+          </a:xfrm>
+          <a:prstGeom prst="rect">
+            <a:avLst/>
+          </a:prstGeom>
+          <a:solidFill>
+            <a:srgbClr val="FFFFFF"/>
+          </a:solidFill>
+          <a:ln w="12700">
+            <a:solidFill>
+              <a:srgbClr val="E2E8F0"/>
+            </a:solidFill>
+          </a:ln>
+        </p:spPr>
+        <p:style>
+          <a:lnRef idx="1">
+            <a:schemeClr val="accent1"/>
+          </a:lnRef>
+          <a:fillRef idx="3">
+            <a:schemeClr val="accent1"/>
+          </a:fillRef>
+          <a:effectRef idx="2">
+            <a:schemeClr val="accent1"/>
+          </a:effectRef>
+          <a:fontRef idx="minor">
+            <a:schemeClr val="lt1"/>
+          </a:fontRef>
+        </p:style>
+        <p:txBody>
+          <a:bodyPr rtlCol="0" anchor="ctr"/>
+          <a:lstStyle/>
+          <a:p>
+            <a:pPr algn="ctr"/>
+          </a:p>
+        </p:txBody>
+      </p:sp>
+      <p:sp>
+        <p:nvSpPr>
+          <p:cNvPr id="18" name="TextBox 17"/>
+          <p:cNvSpPr txBox="1"/>
+          <p:nvPr/>
+        </p:nvSpPr>
+        <p:spPr>
+          <a:xfrm>
+            <a:off x="-564376206780" y="2423160"/>
+            <a:ext cx="-188126484300" cy="548640"/>
+          </a:xfrm>
+          <a:prstGeom prst="rect">
+            <a:avLst/>
+          </a:prstGeom>
+          <a:noFill/>
+        </p:spPr>
+        <p:txBody>
+          <a:bodyPr wrap="square" anchor="t">
+            <a:spAutoFit/>
+          </a:bodyPr>
+          <a:lstStyle/>
+          <a:p>
+            <a:pPr algn="l">
+              <a:lnSpc>
+                <a:spcPct val="115000"/>
+              </a:lnSpc>
+            </a:pPr>
+            <a:r>
+              <a:rPr sz="2800" b="0">
+                <a:solidFill>
+                  <a:srgbClr val="0F172A"/>
+                </a:solidFill>
+              </a:rPr>
+              <a:t>📄</a:t>
+            </a:r>
+          </a:p>
+        </p:txBody>
+      </p:sp>
+      <p:sp>
+        <p:nvSpPr>
+          <p:cNvPr id="19" name="TextBox 18"/>
+          <p:cNvSpPr txBox="1"/>
+          <p:nvPr/>
+        </p:nvSpPr>
+        <p:spPr>
+          <a:xfrm>
+            <a:off x="-564376206780" y="3063240"/>
+            <a:ext cx="-188126484300" cy="548640"/>
+          </a:xfrm>
+          <a:prstGeom prst="rect">
+            <a:avLst/>
+          </a:prstGeom>
+          <a:noFill/>
+        </p:spPr>
+        <p:txBody>
+          <a:bodyPr wrap="square" anchor="t">
+            <a:spAutoFit/>
+          </a:bodyPr>
+          <a:lstStyle/>
+          <a:p>
+            <a:pPr algn="l">
+              <a:lnSpc>
+                <a:spcPct val="115000"/>
+              </a:lnSpc>
+            </a:pPr>
+            <a:r>
+              <a:rPr sz="1700" b="1">
+                <a:solidFill>
+                  <a:srgbClr val="0F172A"/>
+                </a:solidFill>
+              </a:rPr>
+              <a:t>Formulir OT PDF</a:t>
+            </a:r>
+          </a:p>
+        </p:txBody>
+      </p:sp>
+      <p:sp>
+        <p:nvSpPr>
+          <p:cNvPr id="20" name="TextBox 19"/>
+          <p:cNvSpPr txBox="1"/>
+          <p:nvPr/>
+        </p:nvSpPr>
+        <p:spPr>
+          <a:xfrm>
+            <a:off x="-564376206780" y="3566160"/>
+            <a:ext cx="-188126484300" cy="1371600"/>
+          </a:xfrm>
+          <a:prstGeom prst="rect">
+            <a:avLst/>
+          </a:prstGeom>
+          <a:noFill/>
+        </p:spPr>
+        <p:txBody>
+          <a:bodyPr wrap="square" anchor="t">
+            <a:spAutoFit/>
+          </a:bodyPr>
+          <a:lstStyle/>
+          <a:p>
+            <a:pPr algn="l">
+              <a:lnSpc>
+                <a:spcPct val="115000"/>
+              </a:lnSpc>
+            </a:pPr>
+            <a:r>
+              <a:rPr sz="1300" b="0">
+                <a:solidFill>
+                  <a:srgbClr val="64748B"/>
+                </a:solidFill>
+              </a:rPr>
+              <a:t>Formulir permohonan resmi dengan foto bukti tersemat — arsip tanpa kertas</a:t>
+            </a:r>
+          </a:p>
+        </p:txBody>
+      </p:sp>
+      <p:sp>
+        <p:nvSpPr>
+          <p:cNvPr id="21" name="Rectangle 20"/>
+          <p:cNvSpPr/>
+          <p:nvPr/>
+        </p:nvSpPr>
+        <p:spPr>
+          <a:xfrm>
+            <a:off x="822960" y="5394960"/>
+            <a:ext cx="10515600" cy="868680"/>
+          </a:xfrm>
+          <a:prstGeom prst="rect">
+            <a:avLst/>
+          </a:prstGeom>
+          <a:solidFill>
+            <a:srgbClr val="EFF6FF"/>
+          </a:solidFill>
+          <a:ln>
+            <a:noFill/>
+          </a:ln>
+        </p:spPr>
+        <p:style>
+          <a:lnRef idx="1">
+            <a:schemeClr val="accent1"/>
+          </a:lnRef>
+          <a:fillRef idx="3">
+            <a:schemeClr val="accent1"/>
+          </a:fillRef>
+          <a:effectRef idx="2">
+            <a:schemeClr val="accent1"/>
+          </a:effectRef>
+          <a:fontRef idx="minor">
+            <a:schemeClr val="lt1"/>
+          </a:fontRef>
+        </p:style>
+        <p:txBody>
+          <a:bodyPr rtlCol="0" anchor="ctr"/>
+          <a:lstStyle/>
+          <a:p>
+            <a:pPr algn="ctr"/>
+          </a:p>
+        </p:txBody>
+      </p:sp>
+      <p:sp>
+        <p:nvSpPr>
+          <p:cNvPr id="22" name="TextBox 21"/>
+          <p:cNvSpPr txBox="1"/>
+          <p:nvPr/>
+        </p:nvSpPr>
+        <p:spPr>
+          <a:xfrm>
+            <a:off x="1051560" y="5559552"/>
+            <a:ext cx="10058400" cy="640080"/>
+          </a:xfrm>
+          <a:prstGeom prst="rect">
+            <a:avLst/>
+          </a:prstGeom>
+          <a:noFill/>
+        </p:spPr>
+        <p:txBody>
+          <a:bodyPr wrap="square" anchor="ctr">
+            <a:spAutoFit/>
+          </a:bodyPr>
+          <a:lstStyle/>
+          <a:p>
+            <a:pPr algn="l">
+              <a:lnSpc>
+                <a:spcPct val="115000"/>
+              </a:lnSpc>
+            </a:pPr>
+            <a:r>
+              <a:rPr sz="1600" b="1">
+                <a:solidFill>
+                  <a:srgbClr val="0F172A"/>
+                </a:solidFill>
+              </a:rPr>
+              <a:t>🔗  Kunci: dari pengajuan sampai PDF resmi — terstruktur, terbukti, bisa diaudit; alur lengkap sudah diuji end-to-end di produksi.</a:t>
+            </a:r>
+          </a:p>
+        </p:txBody>
+      </p:sp>
+      <p:pic>
+        <p:nvPicPr>
+          <p:cNvPr id="23" name="Picture 22" descr="bpf-badge.png"/>
+          <p:cNvPicPr>
+            <a:picLocks noChangeAspect="1"/>
+          </p:cNvPicPr>
+          <p:nvPr/>
+        </p:nvPicPr>
+        <p:blipFill>
+          <a:blip r:embed="rId2"/>
+          <a:stretch>
+            <a:fillRect/>
+          </a:stretch>
+        </p:blipFill>
+        <p:spPr>
+          <a:xfrm>
+            <a:off x="274320" y="6355080"/>
+            <a:ext cx="457200" cy="457200"/>
+          </a:xfrm>
+          <a:prstGeom prst="rect">
+            <a:avLst/>
+          </a:prstGeom>
+        </p:spPr>
+      </p:pic>
+      <p:sp>
+        <p:nvSpPr>
+          <p:cNvPr id="24" name="TextBox 23"/>
+          <p:cNvSpPr txBox="1"/>
+          <p:nvPr/>
+        </p:nvSpPr>
+        <p:spPr>
+          <a:xfrm>
+            <a:off x="10881360" y="6446520"/>
+            <a:ext cx="1097280" cy="320040"/>
+          </a:xfrm>
+          <a:prstGeom prst="rect">
+            <a:avLst/>
+          </a:prstGeom>
+          <a:noFill/>
+        </p:spPr>
+        <p:txBody>
+          <a:bodyPr wrap="square" anchor="t">
+            <a:spAutoFit/>
+          </a:bodyPr>
+          <a:lstStyle/>
+          <a:p>
+            <a:pPr algn="r">
+              <a:lnSpc>
+                <a:spcPct val="115000"/>
+              </a:lnSpc>
+            </a:pPr>
+            <a:r>
+              <a:rPr sz="1100" b="0">
+                <a:solidFill>
+                  <a:srgbClr val="64748B"/>
+                </a:solidFill>
+              </a:rPr>
+              <a:t>6 / 13</a:t>
+            </a:r>
+          </a:p>
+        </p:txBody>
+      </p:sp>
+    </p:spTree>
+  </p:cSld>
+  <p:clrMapOvr>
+    <a:masterClrMapping/>
+  </p:clrMapOvr>
+</p:sld>
+</file>
+
+<file path=ppt/slides/slide7.xml><?xml version="1.0" encoding="utf-8"?>
+<p:sld xmlns:a="http://schemas.openxmlformats.org/drawingml/2006/main" xmlns:p="http://schemas.openxmlformats.org/presentationml/2006/main" xmlns:r="http://schemas.openxmlformats.org/officeDocument/2006/relationships">
+  <p:cSld>
+    <p:spTree>
+      <p:nvGrpSpPr>
+        <p:cNvPr id="1" name=""/>
+        <p:cNvGrpSpPr/>
+        <p:nvPr/>
+      </p:nvGrpSpPr>
+      <p:grpSpPr/>
+      <p:sp>
+        <p:nvSpPr>
+          <p:cNvPr id="2" name="TextBox 1"/>
+          <p:cNvSpPr txBox="1"/>
+          <p:nvPr/>
+        </p:nvSpPr>
+        <p:spPr>
+          <a:xfrm>
+            <a:off x="822960" y="411480"/>
+            <a:ext cx="10058400" cy="365760"/>
+          </a:xfrm>
+          <a:prstGeom prst="rect">
+            <a:avLst/>
+          </a:prstGeom>
+          <a:noFill/>
+        </p:spPr>
+        <p:txBody>
+          <a:bodyPr wrap="square" anchor="t">
+            <a:spAutoFit/>
+          </a:bodyPr>
+          <a:lstStyle/>
+          <a:p>
+            <a:pPr algn="l">
+              <a:lnSpc>
+                <a:spcPct val="115000"/>
+              </a:lnSpc>
+            </a:pPr>
+            <a:r>
+              <a:rPr sz="1300" b="1">
+                <a:solidFill>
+                  <a:srgbClr val="2563EB"/>
+                </a:solidFill>
+              </a:rPr>
+              <a:t>DEMO UTAMA 4</a:t>
             </a:r>
           </a:p>
         </p:txBody>
@@ -8993,721 +10514,7 @@
                   <a:srgbClr val="64748B"/>
                 </a:solidFill>
               </a:rPr>
-              <a:t>6 / 12</a:t>
-            </a:r>
-          </a:p>
-        </p:txBody>
-      </p:sp>
-    </p:spTree>
-  </p:cSld>
-  <p:clrMapOvr>
-    <a:masterClrMapping/>
-  </p:clrMapOvr>
-</p:sld>
-</file>
-
-<file path=ppt/slides/slide7.xml><?xml version="1.0" encoding="utf-8"?>
-<p:sld xmlns:a="http://schemas.openxmlformats.org/drawingml/2006/main" xmlns:p="http://schemas.openxmlformats.org/presentationml/2006/main" xmlns:r="http://schemas.openxmlformats.org/officeDocument/2006/relationships">
-  <p:cSld>
-    <p:spTree>
-      <p:nvGrpSpPr>
-        <p:cNvPr id="1" name=""/>
-        <p:cNvGrpSpPr/>
-        <p:nvPr/>
-      </p:nvGrpSpPr>
-      <p:grpSpPr/>
-      <p:sp>
-        <p:nvSpPr>
-          <p:cNvPr id="2" name="TextBox 1"/>
-          <p:cNvSpPr txBox="1"/>
-          <p:nvPr/>
-        </p:nvSpPr>
-        <p:spPr>
-          <a:xfrm>
-            <a:off x="822960" y="411480"/>
-            <a:ext cx="10058400" cy="365760"/>
-          </a:xfrm>
-          <a:prstGeom prst="rect">
-            <a:avLst/>
-          </a:prstGeom>
-          <a:noFill/>
-        </p:spPr>
-        <p:txBody>
-          <a:bodyPr wrap="square" anchor="t">
-            <a:spAutoFit/>
-          </a:bodyPr>
-          <a:lstStyle/>
-          <a:p>
-            <a:pPr algn="l">
-              <a:lnSpc>
-                <a:spcPct val="115000"/>
-              </a:lnSpc>
-            </a:pPr>
-            <a:r>
-              <a:rPr sz="1300" b="1">
-                <a:solidFill>
-                  <a:srgbClr val="2563EB"/>
-                </a:solidFill>
-              </a:rPr>
-              <a:t>DEMO UTAMA 4</a:t>
-            </a:r>
-          </a:p>
-        </p:txBody>
-      </p:sp>
-      <p:sp>
-        <p:nvSpPr>
-          <p:cNvPr id="3" name="TextBox 2"/>
-          <p:cNvSpPr txBox="1"/>
-          <p:nvPr/>
-        </p:nvSpPr>
-        <p:spPr>
-          <a:xfrm>
-            <a:off x="822960" y="777240"/>
-            <a:ext cx="10515600" cy="822960"/>
-          </a:xfrm>
-          <a:prstGeom prst="rect">
-            <a:avLst/>
-          </a:prstGeom>
-          <a:noFill/>
-        </p:spPr>
-        <p:txBody>
-          <a:bodyPr wrap="square" anchor="t">
-            <a:spAutoFit/>
-          </a:bodyPr>
-          <a:lstStyle/>
-          <a:p>
-            <a:pPr algn="l">
-              <a:lnSpc>
-                <a:spcPct val="115000"/>
-              </a:lnSpc>
-            </a:pPr>
-            <a:r>
-              <a:rPr sz="3400" b="1">
-                <a:solidFill>
-                  <a:srgbClr val="0F172A"/>
-                </a:solidFill>
-              </a:rPr>
-              <a:t>Realtime &amp; Notifikasi</a:t>
-            </a:r>
-          </a:p>
-        </p:txBody>
-      </p:sp>
-      <p:sp>
-        <p:nvSpPr>
-          <p:cNvPr id="4" name="Rectangle 3"/>
-          <p:cNvSpPr/>
-          <p:nvPr/>
-        </p:nvSpPr>
-        <p:spPr>
-          <a:xfrm>
-            <a:off x="822960" y="1920240"/>
-            <a:ext cx="-167221966800" cy="2926080"/>
-          </a:xfrm>
-          <a:prstGeom prst="rect">
-            <a:avLst/>
-          </a:prstGeom>
-          <a:solidFill>
-            <a:srgbClr val="FFFFFF"/>
-          </a:solidFill>
-          <a:ln w="12700">
-            <a:solidFill>
-              <a:srgbClr val="E2E8F0"/>
-            </a:solidFill>
-          </a:ln>
-        </p:spPr>
-        <p:style>
-          <a:lnRef idx="1">
-            <a:schemeClr val="accent1"/>
-          </a:lnRef>
-          <a:fillRef idx="3">
-            <a:schemeClr val="accent1"/>
-          </a:fillRef>
-          <a:effectRef idx="2">
-            <a:schemeClr val="accent1"/>
-          </a:effectRef>
-          <a:fontRef idx="minor">
-            <a:schemeClr val="lt1"/>
-          </a:fontRef>
-        </p:style>
-        <p:txBody>
-          <a:bodyPr rtlCol="0" anchor="ctr"/>
-          <a:lstStyle/>
-          <a:p>
-            <a:pPr algn="ctr"/>
-          </a:p>
-        </p:txBody>
-      </p:sp>
-      <p:sp>
-        <p:nvSpPr>
-          <p:cNvPr id="5" name="TextBox 4"/>
-          <p:cNvSpPr txBox="1"/>
-          <p:nvPr/>
-        </p:nvSpPr>
-        <p:spPr>
-          <a:xfrm>
-            <a:off x="1051560" y="2194560"/>
-            <a:ext cx="-167222424000" cy="548640"/>
-          </a:xfrm>
-          <a:prstGeom prst="rect">
-            <a:avLst/>
-          </a:prstGeom>
-          <a:noFill/>
-        </p:spPr>
-        <p:txBody>
-          <a:bodyPr wrap="square" anchor="t">
-            <a:spAutoFit/>
-          </a:bodyPr>
-          <a:lstStyle/>
-          <a:p>
-            <a:pPr algn="l">
-              <a:lnSpc>
-                <a:spcPct val="115000"/>
-              </a:lnSpc>
-            </a:pPr>
-            <a:r>
-              <a:rPr sz="2800" b="0">
-                <a:solidFill>
-                  <a:srgbClr val="0F172A"/>
-                </a:solidFill>
-              </a:rPr>
-              <a:t>🔔</a:t>
-            </a:r>
-          </a:p>
-        </p:txBody>
-      </p:sp>
-      <p:sp>
-        <p:nvSpPr>
-          <p:cNvPr id="6" name="TextBox 5"/>
-          <p:cNvSpPr txBox="1"/>
-          <p:nvPr/>
-        </p:nvSpPr>
-        <p:spPr>
-          <a:xfrm>
-            <a:off x="1051560" y="2834640"/>
-            <a:ext cx="-167222424000" cy="548640"/>
-          </a:xfrm>
-          <a:prstGeom prst="rect">
-            <a:avLst/>
-          </a:prstGeom>
-          <a:noFill/>
-        </p:spPr>
-        <p:txBody>
-          <a:bodyPr wrap="square" anchor="t">
-            <a:spAutoFit/>
-          </a:bodyPr>
-          <a:lstStyle/>
-          <a:p>
-            <a:pPr algn="l">
-              <a:lnSpc>
-                <a:spcPct val="115000"/>
-              </a:lnSpc>
-            </a:pPr>
-            <a:r>
-              <a:rPr sz="1700" b="1">
-                <a:solidFill>
-                  <a:srgbClr val="0F172A"/>
-                </a:solidFill>
-              </a:rPr>
-              <a:t>Toast &amp; Lonceng</a:t>
-            </a:r>
-          </a:p>
-        </p:txBody>
-      </p:sp>
-      <p:sp>
-        <p:nvSpPr>
-          <p:cNvPr id="7" name="TextBox 6"/>
-          <p:cNvSpPr txBox="1"/>
-          <p:nvPr/>
-        </p:nvSpPr>
-        <p:spPr>
-          <a:xfrm>
-            <a:off x="1051560" y="3337560"/>
-            <a:ext cx="-167222424000" cy="1371600"/>
-          </a:xfrm>
-          <a:prstGeom prst="rect">
-            <a:avLst/>
-          </a:prstGeom>
-          <a:noFill/>
-        </p:spPr>
-        <p:txBody>
-          <a:bodyPr wrap="square" anchor="t">
-            <a:spAutoFit/>
-          </a:bodyPr>
-          <a:lstStyle/>
-          <a:p>
-            <a:pPr algn="l">
-              <a:lnSpc>
-                <a:spcPct val="115000"/>
-              </a:lnSpc>
-            </a:pPr>
-            <a:r>
-              <a:rPr sz="1300" b="0">
-                <a:solidFill>
-                  <a:srgbClr val="64748B"/>
-                </a:solidFill>
-              </a:rPr>
-              <a:t>Pengajuan baru muncul seketika — ikon per jenis (klaim, trip, air minum, appointment)</a:t>
-            </a:r>
-          </a:p>
-        </p:txBody>
-      </p:sp>
-      <p:sp>
-        <p:nvSpPr>
-          <p:cNvPr id="8" name="Rectangle 7"/>
-          <p:cNvSpPr/>
-          <p:nvPr/>
-        </p:nvSpPr>
-        <p:spPr>
-          <a:xfrm>
-            <a:off x="-167220869520" y="1920240"/>
-            <a:ext cx="-167221966800" cy="2926080"/>
-          </a:xfrm>
-          <a:prstGeom prst="rect">
-            <a:avLst/>
-          </a:prstGeom>
-          <a:solidFill>
-            <a:srgbClr val="FFFFFF"/>
-          </a:solidFill>
-          <a:ln w="12700">
-            <a:solidFill>
-              <a:srgbClr val="E2E8F0"/>
-            </a:solidFill>
-          </a:ln>
-        </p:spPr>
-        <p:style>
-          <a:lnRef idx="1">
-            <a:schemeClr val="accent1"/>
-          </a:lnRef>
-          <a:fillRef idx="3">
-            <a:schemeClr val="accent1"/>
-          </a:fillRef>
-          <a:effectRef idx="2">
-            <a:schemeClr val="accent1"/>
-          </a:effectRef>
-          <a:fontRef idx="minor">
-            <a:schemeClr val="lt1"/>
-          </a:fontRef>
-        </p:style>
-        <p:txBody>
-          <a:bodyPr rtlCol="0" anchor="ctr"/>
-          <a:lstStyle/>
-          <a:p>
-            <a:pPr algn="ctr"/>
-          </a:p>
-        </p:txBody>
-      </p:sp>
-      <p:sp>
-        <p:nvSpPr>
-          <p:cNvPr id="9" name="TextBox 8"/>
-          <p:cNvSpPr txBox="1"/>
-          <p:nvPr/>
-        </p:nvSpPr>
-        <p:spPr>
-          <a:xfrm>
-            <a:off x="-167220640920" y="2194560"/>
-            <a:ext cx="-167222424000" cy="548640"/>
-          </a:xfrm>
-          <a:prstGeom prst="rect">
-            <a:avLst/>
-          </a:prstGeom>
-          <a:noFill/>
-        </p:spPr>
-        <p:txBody>
-          <a:bodyPr wrap="square" anchor="t">
-            <a:spAutoFit/>
-          </a:bodyPr>
-          <a:lstStyle/>
-          <a:p>
-            <a:pPr algn="l">
-              <a:lnSpc>
-                <a:spcPct val="115000"/>
-              </a:lnSpc>
-            </a:pPr>
-            <a:r>
-              <a:rPr sz="2800" b="0">
-                <a:solidFill>
-                  <a:srgbClr val="0F172A"/>
-                </a:solidFill>
-              </a:rPr>
-              <a:t>🔄</a:t>
-            </a:r>
-          </a:p>
-        </p:txBody>
-      </p:sp>
-      <p:sp>
-        <p:nvSpPr>
-          <p:cNvPr id="10" name="TextBox 9"/>
-          <p:cNvSpPr txBox="1"/>
-          <p:nvPr/>
-        </p:nvSpPr>
-        <p:spPr>
-          <a:xfrm>
-            <a:off x="-167220640920" y="2834640"/>
-            <a:ext cx="-167222424000" cy="548640"/>
-          </a:xfrm>
-          <a:prstGeom prst="rect">
-            <a:avLst/>
-          </a:prstGeom>
-          <a:noFill/>
-        </p:spPr>
-        <p:txBody>
-          <a:bodyPr wrap="square" anchor="t">
-            <a:spAutoFit/>
-          </a:bodyPr>
-          <a:lstStyle/>
-          <a:p>
-            <a:pPr algn="l">
-              <a:lnSpc>
-                <a:spcPct val="115000"/>
-              </a:lnSpc>
-            </a:pPr>
-            <a:r>
-              <a:rPr sz="1700" b="1">
-                <a:solidFill>
-                  <a:srgbClr val="0F172A"/>
-                </a:solidFill>
-              </a:rPr>
-              <a:t>Auto-refresh</a:t>
-            </a:r>
-          </a:p>
-        </p:txBody>
-      </p:sp>
-      <p:sp>
-        <p:nvSpPr>
-          <p:cNvPr id="11" name="TextBox 10"/>
-          <p:cNvSpPr txBox="1"/>
-          <p:nvPr/>
-        </p:nvSpPr>
-        <p:spPr>
-          <a:xfrm>
-            <a:off x="-167220640920" y="3337560"/>
-            <a:ext cx="-167222424000" cy="1371600"/>
-          </a:xfrm>
-          <a:prstGeom prst="rect">
-            <a:avLst/>
-          </a:prstGeom>
-          <a:noFill/>
-        </p:spPr>
-        <p:txBody>
-          <a:bodyPr wrap="square" anchor="t">
-            <a:spAutoFit/>
-          </a:bodyPr>
-          <a:lstStyle/>
-          <a:p>
-            <a:pPr algn="l">
-              <a:lnSpc>
-                <a:spcPct val="115000"/>
-              </a:lnSpc>
-            </a:pPr>
-            <a:r>
-              <a:rPr sz="1300" b="0">
-                <a:solidFill>
-                  <a:srgbClr val="64748B"/>
-                </a:solidFill>
-              </a:rPr>
-              <a:t>Antrean GA/Finance ter-refresh sendiri tanpa muat ulang</a:t>
-            </a:r>
-          </a:p>
-        </p:txBody>
-      </p:sp>
-      <p:sp>
-        <p:nvSpPr>
-          <p:cNvPr id="12" name="Rectangle 11"/>
-          <p:cNvSpPr/>
-          <p:nvPr/>
-        </p:nvSpPr>
-        <p:spPr>
-          <a:xfrm>
-            <a:off x="-334442562000" y="1920240"/>
-            <a:ext cx="-167221966800" cy="2926080"/>
-          </a:xfrm>
-          <a:prstGeom prst="rect">
-            <a:avLst/>
-          </a:prstGeom>
-          <a:solidFill>
-            <a:srgbClr val="FFFFFF"/>
-          </a:solidFill>
-          <a:ln w="12700">
-            <a:solidFill>
-              <a:srgbClr val="E2E8F0"/>
-            </a:solidFill>
-          </a:ln>
-        </p:spPr>
-        <p:style>
-          <a:lnRef idx="1">
-            <a:schemeClr val="accent1"/>
-          </a:lnRef>
-          <a:fillRef idx="3">
-            <a:schemeClr val="accent1"/>
-          </a:fillRef>
-          <a:effectRef idx="2">
-            <a:schemeClr val="accent1"/>
-          </a:effectRef>
-          <a:fontRef idx="minor">
-            <a:schemeClr val="lt1"/>
-          </a:fontRef>
-        </p:style>
-        <p:txBody>
-          <a:bodyPr rtlCol="0" anchor="ctr"/>
-          <a:lstStyle/>
-          <a:p>
-            <a:pPr algn="ctr"/>
-          </a:p>
-        </p:txBody>
-      </p:sp>
-      <p:sp>
-        <p:nvSpPr>
-          <p:cNvPr id="13" name="TextBox 12"/>
-          <p:cNvSpPr txBox="1"/>
-          <p:nvPr/>
-        </p:nvSpPr>
-        <p:spPr>
-          <a:xfrm>
-            <a:off x="-334442333400" y="2194560"/>
-            <a:ext cx="-167222424000" cy="548640"/>
-          </a:xfrm>
-          <a:prstGeom prst="rect">
-            <a:avLst/>
-          </a:prstGeom>
-          <a:noFill/>
-        </p:spPr>
-        <p:txBody>
-          <a:bodyPr wrap="square" anchor="t">
-            <a:spAutoFit/>
-          </a:bodyPr>
-          <a:lstStyle/>
-          <a:p>
-            <a:pPr algn="l">
-              <a:lnSpc>
-                <a:spcPct val="115000"/>
-              </a:lnSpc>
-            </a:pPr>
-            <a:r>
-              <a:rPr sz="2800" b="0">
-                <a:solidFill>
-                  <a:srgbClr val="0F172A"/>
-                </a:solidFill>
-              </a:rPr>
-              <a:t>🟢</a:t>
-            </a:r>
-          </a:p>
-        </p:txBody>
-      </p:sp>
-      <p:sp>
-        <p:nvSpPr>
-          <p:cNvPr id="14" name="TextBox 13"/>
-          <p:cNvSpPr txBox="1"/>
-          <p:nvPr/>
-        </p:nvSpPr>
-        <p:spPr>
-          <a:xfrm>
-            <a:off x="-334442333400" y="2834640"/>
-            <a:ext cx="-167222424000" cy="548640"/>
-          </a:xfrm>
-          <a:prstGeom prst="rect">
-            <a:avLst/>
-          </a:prstGeom>
-          <a:noFill/>
-        </p:spPr>
-        <p:txBody>
-          <a:bodyPr wrap="square" anchor="t">
-            <a:spAutoFit/>
-          </a:bodyPr>
-          <a:lstStyle/>
-          <a:p>
-            <a:pPr algn="l">
-              <a:lnSpc>
-                <a:spcPct val="115000"/>
-              </a:lnSpc>
-            </a:pPr>
-            <a:r>
-              <a:rPr sz="1700" b="1">
-                <a:solidFill>
-                  <a:srgbClr val="0F172A"/>
-                </a:solidFill>
-              </a:rPr>
-              <a:t>Indikator hidup</a:t>
-            </a:r>
-          </a:p>
-        </p:txBody>
-      </p:sp>
-      <p:sp>
-        <p:nvSpPr>
-          <p:cNvPr id="15" name="TextBox 14"/>
-          <p:cNvSpPr txBox="1"/>
-          <p:nvPr/>
-        </p:nvSpPr>
-        <p:spPr>
-          <a:xfrm>
-            <a:off x="-334442333400" y="3337560"/>
-            <a:ext cx="-167222424000" cy="1371600"/>
-          </a:xfrm>
-          <a:prstGeom prst="rect">
-            <a:avLst/>
-          </a:prstGeom>
-          <a:noFill/>
-        </p:spPr>
-        <p:txBody>
-          <a:bodyPr wrap="square" anchor="t">
-            <a:spAutoFit/>
-          </a:bodyPr>
-          <a:lstStyle/>
-          <a:p>
-            <a:pPr algn="l">
-              <a:lnSpc>
-                <a:spcPct val="115000"/>
-              </a:lnSpc>
-            </a:pPr>
-            <a:r>
-              <a:rPr sz="1300" b="0">
-                <a:solidFill>
-                  <a:srgbClr val="64748B"/>
-                </a:solidFill>
-              </a:rPr>
-              <a:t>“⚡ Realtime” di pojok — jika putus tampil merah</a:t>
-            </a:r>
-          </a:p>
-        </p:txBody>
-      </p:sp>
-      <p:sp>
-        <p:nvSpPr>
-          <p:cNvPr id="16" name="Rectangle 15"/>
-          <p:cNvSpPr/>
-          <p:nvPr/>
-        </p:nvSpPr>
-        <p:spPr>
-          <a:xfrm>
-            <a:off x="822960" y="5394960"/>
-            <a:ext cx="10515600" cy="868680"/>
-          </a:xfrm>
-          <a:prstGeom prst="rect">
-            <a:avLst/>
-          </a:prstGeom>
-          <a:solidFill>
-            <a:srgbClr val="EFF6FF"/>
-          </a:solidFill>
-          <a:ln>
-            <a:noFill/>
-          </a:ln>
-        </p:spPr>
-        <p:style>
-          <a:lnRef idx="1">
-            <a:schemeClr val="accent1"/>
-          </a:lnRef>
-          <a:fillRef idx="3">
-            <a:schemeClr val="accent1"/>
-          </a:fillRef>
-          <a:effectRef idx="2">
-            <a:schemeClr val="accent1"/>
-          </a:effectRef>
-          <a:fontRef idx="minor">
-            <a:schemeClr val="lt1"/>
-          </a:fontRef>
-        </p:style>
-        <p:txBody>
-          <a:bodyPr rtlCol="0" anchor="ctr"/>
-          <a:lstStyle/>
-          <a:p>
-            <a:pPr algn="ctr"/>
-          </a:p>
-        </p:txBody>
-      </p:sp>
-      <p:sp>
-        <p:nvSpPr>
-          <p:cNvPr id="17" name="TextBox 16"/>
-          <p:cNvSpPr txBox="1"/>
-          <p:nvPr/>
-        </p:nvSpPr>
-        <p:spPr>
-          <a:xfrm>
-            <a:off x="1051560" y="5559552"/>
-            <a:ext cx="10058400" cy="640080"/>
-          </a:xfrm>
-          <a:prstGeom prst="rect">
-            <a:avLst/>
-          </a:prstGeom>
-          <a:noFill/>
-        </p:spPr>
-        <p:txBody>
-          <a:bodyPr wrap="square" anchor="ctr">
-            <a:spAutoFit/>
-          </a:bodyPr>
-          <a:lstStyle/>
-          <a:p>
-            <a:pPr algn="l">
-              <a:lnSpc>
-                <a:spcPct val="115000"/>
-              </a:lnSpc>
-            </a:pPr>
-            <a:r>
-              <a:rPr sz="1600" b="1">
-                <a:solidFill>
-                  <a:srgbClr val="0F172A"/>
-                </a:solidFill>
-              </a:rPr>
-              <a:t>📡  Kunci: aplikasi ini “hidup” — begitu ada yang mengajukan, yang berwenang langsung tahu, bukan besok pagi.</a:t>
-            </a:r>
-          </a:p>
-        </p:txBody>
-      </p:sp>
-      <p:pic>
-        <p:nvPicPr>
-          <p:cNvPr id="18" name="Picture 17" descr="bpf-badge.png"/>
-          <p:cNvPicPr>
-            <a:picLocks noChangeAspect="1"/>
-          </p:cNvPicPr>
-          <p:nvPr/>
-        </p:nvPicPr>
-        <p:blipFill>
-          <a:blip r:embed="rId2"/>
-          <a:stretch>
-            <a:fillRect/>
-          </a:stretch>
-        </p:blipFill>
-        <p:spPr>
-          <a:xfrm>
-            <a:off x="274320" y="6355080"/>
-            <a:ext cx="457200" cy="457200"/>
-          </a:xfrm>
-          <a:prstGeom prst="rect">
-            <a:avLst/>
-          </a:prstGeom>
-        </p:spPr>
-      </p:pic>
-      <p:sp>
-        <p:nvSpPr>
-          <p:cNvPr id="19" name="TextBox 18"/>
-          <p:cNvSpPr txBox="1"/>
-          <p:nvPr/>
-        </p:nvSpPr>
-        <p:spPr>
-          <a:xfrm>
-            <a:off x="10881360" y="6446520"/>
-            <a:ext cx="1097280" cy="320040"/>
-          </a:xfrm>
-          <a:prstGeom prst="rect">
-            <a:avLst/>
-          </a:prstGeom>
-          <a:noFill/>
-        </p:spPr>
-        <p:txBody>
-          <a:bodyPr wrap="square" anchor="t">
-            <a:spAutoFit/>
-          </a:bodyPr>
-          <a:lstStyle/>
-          <a:p>
-            <a:pPr algn="r">
-              <a:lnSpc>
-                <a:spcPct val="115000"/>
-              </a:lnSpc>
-            </a:pPr>
-            <a:r>
-              <a:rPr sz="1100" b="0">
-                <a:solidFill>
-                  <a:srgbClr val="64748B"/>
-                </a:solidFill>
-              </a:rPr>
-              <a:t>7 / 12</a:t>
+              <a:t>6 / 13</a:t>
             </a:r>
           </a:p>
         </p:txBody>
@@ -9801,128 +10608,32 @@
                   <a:srgbClr val="0F172A"/>
                 </a:solidFill>
               </a:rPr>
-              <a:t>Driver: Offline di Jalan</a:t>
-            </a:r>
-          </a:p>
-        </p:txBody>
-      </p:sp>
-      <p:sp>
-        <p:nvSpPr>
-          <p:cNvPr id="4" name="TextBox 3"/>
-          <p:cNvSpPr txBox="1"/>
-          <p:nvPr/>
-        </p:nvSpPr>
-        <p:spPr>
-          <a:xfrm>
-            <a:off x="1005840" y="1828800"/>
-            <a:ext cx="10241280" cy="3474720"/>
-          </a:xfrm>
-          <a:prstGeom prst="rect">
-            <a:avLst/>
-          </a:prstGeom>
-          <a:noFill/>
-        </p:spPr>
-        <p:txBody>
-          <a:bodyPr wrap="square">
-            <a:spAutoFit/>
-          </a:bodyPr>
-          <a:lstStyle/>
-          <a:p>
-            <a:pPr>
-              <a:lnSpc>
-                <a:spcPct val="170000"/>
-              </a:lnSpc>
-            </a:pPr>
-            <a:r>
-              <a:rPr sz="1900">
-                <a:solidFill>
-                  <a:srgbClr val="64748B"/>
-                </a:solidFill>
-              </a:rPr>
-              <a:t>→  Login PIN — identitas menempel otomatis di semua laporan (tidak bisa mengaku-ngaku).</a:t>
-            </a:r>
-          </a:p>
-          <a:p>
-            <a:pPr>
-              <a:lnSpc>
-                <a:spcPct val="170000"/>
-              </a:lnSpc>
-            </a:pPr>
-            <a:r>
-              <a:rPr sz="1900">
-                <a:solidFill>
-                  <a:srgbClr val="64748B"/>
-                </a:solidFill>
-              </a:rPr>
-              <a:t>→  4 tab: ⛽ BBM · 💰 Kasbon · 🗺️ Trip · 📊 Rapor.</a:t>
-            </a:r>
-          </a:p>
-          <a:p>
-            <a:pPr>
-              <a:lnSpc>
-                <a:spcPct val="170000"/>
-              </a:lnSpc>
-            </a:pPr>
-            <a:r>
-              <a:rPr sz="1900">
-                <a:solidFill>
-                  <a:srgbClr val="64748B"/>
-                </a:solidFill>
-              </a:rPr>
-              <a:t>→  Offline-first: data tersimpan di HP, terkirim otomatis saat sinyal kembali + tombol 🔄 Sinkron.</a:t>
-            </a:r>
-          </a:p>
-          <a:p>
-            <a:pPr>
-              <a:lnSpc>
-                <a:spcPct val="170000"/>
-              </a:lnSpc>
-            </a:pPr>
-            <a:r>
-              <a:rPr sz="1900">
-                <a:solidFill>
-                  <a:srgbClr val="64748B"/>
-                </a:solidFill>
-              </a:rPr>
-              <a:t>→  Rapor performa: masukkan nopol → HEMAT / CUKUP / BOROS.</a:t>
-            </a:r>
-          </a:p>
-          <a:p>
-            <a:pPr>
-              <a:lnSpc>
-                <a:spcPct val="170000"/>
-              </a:lnSpc>
-            </a:pPr>
-            <a:r>
-              <a:rPr sz="1900">
-                <a:solidFill>
-                  <a:srgbClr val="64748B"/>
-                </a:solidFill>
-              </a:rPr>
-              <a:t>→  Bisa dipasang di layar utama HP seperti aplikasi biasa (PWA).</a:t>
-            </a:r>
-          </a:p>
-        </p:txBody>
-      </p:sp>
-      <p:sp>
-        <p:nvSpPr>
-          <p:cNvPr id="5" name="Rectangle 4"/>
+              <a:t>Realtime &amp; Notifikasi</a:t>
+            </a:r>
+          </a:p>
+        </p:txBody>
+      </p:sp>
+      <p:sp>
+        <p:nvSpPr>
+          <p:cNvPr id="4" name="Rectangle 3"/>
           <p:cNvSpPr/>
           <p:nvPr/>
         </p:nvSpPr>
         <p:spPr>
           <a:xfrm>
-            <a:off x="822960" y="5394960"/>
-            <a:ext cx="10515600" cy="868680"/>
+            <a:off x="822960" y="1920240"/>
+            <a:ext cx="-167221966800" cy="2926080"/>
           </a:xfrm>
           <a:prstGeom prst="rect">
             <a:avLst/>
           </a:prstGeom>
           <a:solidFill>
-            <a:srgbClr val="EFF6FF"/>
+            <a:srgbClr val="FFFFFF"/>
           </a:solidFill>
-          <a:ln>
-            <a:noFill/>
+          <a:ln w="12700">
+            <a:solidFill>
+              <a:srgbClr val="E2E8F0"/>
+            </a:solidFill>
           </a:ln>
         </p:spPr>
         <p:style>
@@ -9949,7 +10660,482 @@
       </p:sp>
       <p:sp>
         <p:nvSpPr>
+          <p:cNvPr id="5" name="TextBox 4"/>
+          <p:cNvSpPr txBox="1"/>
+          <p:nvPr/>
+        </p:nvSpPr>
+        <p:spPr>
+          <a:xfrm>
+            <a:off x="1051560" y="2194560"/>
+            <a:ext cx="-167222424000" cy="548640"/>
+          </a:xfrm>
+          <a:prstGeom prst="rect">
+            <a:avLst/>
+          </a:prstGeom>
+          <a:noFill/>
+        </p:spPr>
+        <p:txBody>
+          <a:bodyPr wrap="square" anchor="t">
+            <a:spAutoFit/>
+          </a:bodyPr>
+          <a:lstStyle/>
+          <a:p>
+            <a:pPr algn="l">
+              <a:lnSpc>
+                <a:spcPct val="115000"/>
+              </a:lnSpc>
+            </a:pPr>
+            <a:r>
+              <a:rPr sz="2800" b="0">
+                <a:solidFill>
+                  <a:srgbClr val="0F172A"/>
+                </a:solidFill>
+              </a:rPr>
+              <a:t>🔔</a:t>
+            </a:r>
+          </a:p>
+        </p:txBody>
+      </p:sp>
+      <p:sp>
+        <p:nvSpPr>
           <p:cNvPr id="6" name="TextBox 5"/>
+          <p:cNvSpPr txBox="1"/>
+          <p:nvPr/>
+        </p:nvSpPr>
+        <p:spPr>
+          <a:xfrm>
+            <a:off x="1051560" y="2834640"/>
+            <a:ext cx="-167222424000" cy="548640"/>
+          </a:xfrm>
+          <a:prstGeom prst="rect">
+            <a:avLst/>
+          </a:prstGeom>
+          <a:noFill/>
+        </p:spPr>
+        <p:txBody>
+          <a:bodyPr wrap="square" anchor="t">
+            <a:spAutoFit/>
+          </a:bodyPr>
+          <a:lstStyle/>
+          <a:p>
+            <a:pPr algn="l">
+              <a:lnSpc>
+                <a:spcPct val="115000"/>
+              </a:lnSpc>
+            </a:pPr>
+            <a:r>
+              <a:rPr sz="1700" b="1">
+                <a:solidFill>
+                  <a:srgbClr val="0F172A"/>
+                </a:solidFill>
+              </a:rPr>
+              <a:t>Toast &amp; Lonceng</a:t>
+            </a:r>
+          </a:p>
+        </p:txBody>
+      </p:sp>
+      <p:sp>
+        <p:nvSpPr>
+          <p:cNvPr id="7" name="TextBox 6"/>
+          <p:cNvSpPr txBox="1"/>
+          <p:nvPr/>
+        </p:nvSpPr>
+        <p:spPr>
+          <a:xfrm>
+            <a:off x="1051560" y="3337560"/>
+            <a:ext cx="-167222424000" cy="1371600"/>
+          </a:xfrm>
+          <a:prstGeom prst="rect">
+            <a:avLst/>
+          </a:prstGeom>
+          <a:noFill/>
+        </p:spPr>
+        <p:txBody>
+          <a:bodyPr wrap="square" anchor="t">
+            <a:spAutoFit/>
+          </a:bodyPr>
+          <a:lstStyle/>
+          <a:p>
+            <a:pPr algn="l">
+              <a:lnSpc>
+                <a:spcPct val="115000"/>
+              </a:lnSpc>
+            </a:pPr>
+            <a:r>
+              <a:rPr sz="1300" b="0">
+                <a:solidFill>
+                  <a:srgbClr val="64748B"/>
+                </a:solidFill>
+              </a:rPr>
+              <a:t>Pengajuan baru muncul seketika — ikon per jenis (klaim, trip, air minum, appointment)</a:t>
+            </a:r>
+          </a:p>
+        </p:txBody>
+      </p:sp>
+      <p:sp>
+        <p:nvSpPr>
+          <p:cNvPr id="8" name="Rectangle 7"/>
+          <p:cNvSpPr/>
+          <p:nvPr/>
+        </p:nvSpPr>
+        <p:spPr>
+          <a:xfrm>
+            <a:off x="-167220869520" y="1920240"/>
+            <a:ext cx="-167221966800" cy="2926080"/>
+          </a:xfrm>
+          <a:prstGeom prst="rect">
+            <a:avLst/>
+          </a:prstGeom>
+          <a:solidFill>
+            <a:srgbClr val="FFFFFF"/>
+          </a:solidFill>
+          <a:ln w="12700">
+            <a:solidFill>
+              <a:srgbClr val="E2E8F0"/>
+            </a:solidFill>
+          </a:ln>
+        </p:spPr>
+        <p:style>
+          <a:lnRef idx="1">
+            <a:schemeClr val="accent1"/>
+          </a:lnRef>
+          <a:fillRef idx="3">
+            <a:schemeClr val="accent1"/>
+          </a:fillRef>
+          <a:effectRef idx="2">
+            <a:schemeClr val="accent1"/>
+          </a:effectRef>
+          <a:fontRef idx="minor">
+            <a:schemeClr val="lt1"/>
+          </a:fontRef>
+        </p:style>
+        <p:txBody>
+          <a:bodyPr rtlCol="0" anchor="ctr"/>
+          <a:lstStyle/>
+          <a:p>
+            <a:pPr algn="ctr"/>
+          </a:p>
+        </p:txBody>
+      </p:sp>
+      <p:sp>
+        <p:nvSpPr>
+          <p:cNvPr id="9" name="TextBox 8"/>
+          <p:cNvSpPr txBox="1"/>
+          <p:nvPr/>
+        </p:nvSpPr>
+        <p:spPr>
+          <a:xfrm>
+            <a:off x="-167220640920" y="2194560"/>
+            <a:ext cx="-167222424000" cy="548640"/>
+          </a:xfrm>
+          <a:prstGeom prst="rect">
+            <a:avLst/>
+          </a:prstGeom>
+          <a:noFill/>
+        </p:spPr>
+        <p:txBody>
+          <a:bodyPr wrap="square" anchor="t">
+            <a:spAutoFit/>
+          </a:bodyPr>
+          <a:lstStyle/>
+          <a:p>
+            <a:pPr algn="l">
+              <a:lnSpc>
+                <a:spcPct val="115000"/>
+              </a:lnSpc>
+            </a:pPr>
+            <a:r>
+              <a:rPr sz="2800" b="0">
+                <a:solidFill>
+                  <a:srgbClr val="0F172A"/>
+                </a:solidFill>
+              </a:rPr>
+              <a:t>🔄</a:t>
+            </a:r>
+          </a:p>
+        </p:txBody>
+      </p:sp>
+      <p:sp>
+        <p:nvSpPr>
+          <p:cNvPr id="10" name="TextBox 9"/>
+          <p:cNvSpPr txBox="1"/>
+          <p:nvPr/>
+        </p:nvSpPr>
+        <p:spPr>
+          <a:xfrm>
+            <a:off x="-167220640920" y="2834640"/>
+            <a:ext cx="-167222424000" cy="548640"/>
+          </a:xfrm>
+          <a:prstGeom prst="rect">
+            <a:avLst/>
+          </a:prstGeom>
+          <a:noFill/>
+        </p:spPr>
+        <p:txBody>
+          <a:bodyPr wrap="square" anchor="t">
+            <a:spAutoFit/>
+          </a:bodyPr>
+          <a:lstStyle/>
+          <a:p>
+            <a:pPr algn="l">
+              <a:lnSpc>
+                <a:spcPct val="115000"/>
+              </a:lnSpc>
+            </a:pPr>
+            <a:r>
+              <a:rPr sz="1700" b="1">
+                <a:solidFill>
+                  <a:srgbClr val="0F172A"/>
+                </a:solidFill>
+              </a:rPr>
+              <a:t>Auto-refresh</a:t>
+            </a:r>
+          </a:p>
+        </p:txBody>
+      </p:sp>
+      <p:sp>
+        <p:nvSpPr>
+          <p:cNvPr id="11" name="TextBox 10"/>
+          <p:cNvSpPr txBox="1"/>
+          <p:nvPr/>
+        </p:nvSpPr>
+        <p:spPr>
+          <a:xfrm>
+            <a:off x="-167220640920" y="3337560"/>
+            <a:ext cx="-167222424000" cy="1371600"/>
+          </a:xfrm>
+          <a:prstGeom prst="rect">
+            <a:avLst/>
+          </a:prstGeom>
+          <a:noFill/>
+        </p:spPr>
+        <p:txBody>
+          <a:bodyPr wrap="square" anchor="t">
+            <a:spAutoFit/>
+          </a:bodyPr>
+          <a:lstStyle/>
+          <a:p>
+            <a:pPr algn="l">
+              <a:lnSpc>
+                <a:spcPct val="115000"/>
+              </a:lnSpc>
+            </a:pPr>
+            <a:r>
+              <a:rPr sz="1300" b="0">
+                <a:solidFill>
+                  <a:srgbClr val="64748B"/>
+                </a:solidFill>
+              </a:rPr>
+              <a:t>Antrean GA/Finance ter-refresh sendiri tanpa muat ulang</a:t>
+            </a:r>
+          </a:p>
+        </p:txBody>
+      </p:sp>
+      <p:sp>
+        <p:nvSpPr>
+          <p:cNvPr id="12" name="Rectangle 11"/>
+          <p:cNvSpPr/>
+          <p:nvPr/>
+        </p:nvSpPr>
+        <p:spPr>
+          <a:xfrm>
+            <a:off x="-334442562000" y="1920240"/>
+            <a:ext cx="-167221966800" cy="2926080"/>
+          </a:xfrm>
+          <a:prstGeom prst="rect">
+            <a:avLst/>
+          </a:prstGeom>
+          <a:solidFill>
+            <a:srgbClr val="FFFFFF"/>
+          </a:solidFill>
+          <a:ln w="12700">
+            <a:solidFill>
+              <a:srgbClr val="E2E8F0"/>
+            </a:solidFill>
+          </a:ln>
+        </p:spPr>
+        <p:style>
+          <a:lnRef idx="1">
+            <a:schemeClr val="accent1"/>
+          </a:lnRef>
+          <a:fillRef idx="3">
+            <a:schemeClr val="accent1"/>
+          </a:fillRef>
+          <a:effectRef idx="2">
+            <a:schemeClr val="accent1"/>
+          </a:effectRef>
+          <a:fontRef idx="minor">
+            <a:schemeClr val="lt1"/>
+          </a:fontRef>
+        </p:style>
+        <p:txBody>
+          <a:bodyPr rtlCol="0" anchor="ctr"/>
+          <a:lstStyle/>
+          <a:p>
+            <a:pPr algn="ctr"/>
+          </a:p>
+        </p:txBody>
+      </p:sp>
+      <p:sp>
+        <p:nvSpPr>
+          <p:cNvPr id="13" name="TextBox 12"/>
+          <p:cNvSpPr txBox="1"/>
+          <p:nvPr/>
+        </p:nvSpPr>
+        <p:spPr>
+          <a:xfrm>
+            <a:off x="-334442333400" y="2194560"/>
+            <a:ext cx="-167222424000" cy="548640"/>
+          </a:xfrm>
+          <a:prstGeom prst="rect">
+            <a:avLst/>
+          </a:prstGeom>
+          <a:noFill/>
+        </p:spPr>
+        <p:txBody>
+          <a:bodyPr wrap="square" anchor="t">
+            <a:spAutoFit/>
+          </a:bodyPr>
+          <a:lstStyle/>
+          <a:p>
+            <a:pPr algn="l">
+              <a:lnSpc>
+                <a:spcPct val="115000"/>
+              </a:lnSpc>
+            </a:pPr>
+            <a:r>
+              <a:rPr sz="2800" b="0">
+                <a:solidFill>
+                  <a:srgbClr val="0F172A"/>
+                </a:solidFill>
+              </a:rPr>
+              <a:t>🟢</a:t>
+            </a:r>
+          </a:p>
+        </p:txBody>
+      </p:sp>
+      <p:sp>
+        <p:nvSpPr>
+          <p:cNvPr id="14" name="TextBox 13"/>
+          <p:cNvSpPr txBox="1"/>
+          <p:nvPr/>
+        </p:nvSpPr>
+        <p:spPr>
+          <a:xfrm>
+            <a:off x="-334442333400" y="2834640"/>
+            <a:ext cx="-167222424000" cy="548640"/>
+          </a:xfrm>
+          <a:prstGeom prst="rect">
+            <a:avLst/>
+          </a:prstGeom>
+          <a:noFill/>
+        </p:spPr>
+        <p:txBody>
+          <a:bodyPr wrap="square" anchor="t">
+            <a:spAutoFit/>
+          </a:bodyPr>
+          <a:lstStyle/>
+          <a:p>
+            <a:pPr algn="l">
+              <a:lnSpc>
+                <a:spcPct val="115000"/>
+              </a:lnSpc>
+            </a:pPr>
+            <a:r>
+              <a:rPr sz="1700" b="1">
+                <a:solidFill>
+                  <a:srgbClr val="0F172A"/>
+                </a:solidFill>
+              </a:rPr>
+              <a:t>Indikator hidup</a:t>
+            </a:r>
+          </a:p>
+        </p:txBody>
+      </p:sp>
+      <p:sp>
+        <p:nvSpPr>
+          <p:cNvPr id="15" name="TextBox 14"/>
+          <p:cNvSpPr txBox="1"/>
+          <p:nvPr/>
+        </p:nvSpPr>
+        <p:spPr>
+          <a:xfrm>
+            <a:off x="-334442333400" y="3337560"/>
+            <a:ext cx="-167222424000" cy="1371600"/>
+          </a:xfrm>
+          <a:prstGeom prst="rect">
+            <a:avLst/>
+          </a:prstGeom>
+          <a:noFill/>
+        </p:spPr>
+        <p:txBody>
+          <a:bodyPr wrap="square" anchor="t">
+            <a:spAutoFit/>
+          </a:bodyPr>
+          <a:lstStyle/>
+          <a:p>
+            <a:pPr algn="l">
+              <a:lnSpc>
+                <a:spcPct val="115000"/>
+              </a:lnSpc>
+            </a:pPr>
+            <a:r>
+              <a:rPr sz="1300" b="0">
+                <a:solidFill>
+                  <a:srgbClr val="64748B"/>
+                </a:solidFill>
+              </a:rPr>
+              <a:t>“⚡ Realtime” di pojok — jika putus tampil merah</a:t>
+            </a:r>
+          </a:p>
+        </p:txBody>
+      </p:sp>
+      <p:sp>
+        <p:nvSpPr>
+          <p:cNvPr id="16" name="Rectangle 15"/>
+          <p:cNvSpPr/>
+          <p:nvPr/>
+        </p:nvSpPr>
+        <p:spPr>
+          <a:xfrm>
+            <a:off x="822960" y="5394960"/>
+            <a:ext cx="10515600" cy="868680"/>
+          </a:xfrm>
+          <a:prstGeom prst="rect">
+            <a:avLst/>
+          </a:prstGeom>
+          <a:solidFill>
+            <a:srgbClr val="EFF6FF"/>
+          </a:solidFill>
+          <a:ln>
+            <a:noFill/>
+          </a:ln>
+        </p:spPr>
+        <p:style>
+          <a:lnRef idx="1">
+            <a:schemeClr val="accent1"/>
+          </a:lnRef>
+          <a:fillRef idx="3">
+            <a:schemeClr val="accent1"/>
+          </a:fillRef>
+          <a:effectRef idx="2">
+            <a:schemeClr val="accent1"/>
+          </a:effectRef>
+          <a:fontRef idx="minor">
+            <a:schemeClr val="lt1"/>
+          </a:fontRef>
+        </p:style>
+        <p:txBody>
+          <a:bodyPr rtlCol="0" anchor="ctr"/>
+          <a:lstStyle/>
+          <a:p>
+            <a:pPr algn="ctr"/>
+          </a:p>
+        </p:txBody>
+      </p:sp>
+      <p:sp>
+        <p:nvSpPr>
+          <p:cNvPr id="17" name="TextBox 16"/>
           <p:cNvSpPr txBox="1"/>
           <p:nvPr/>
         </p:nvSpPr>
@@ -9980,14 +11166,14 @@
                   <a:srgbClr val="0F172A"/>
                 </a:solidFill>
               </a:rPr>
-              <a:t>🌐  Kunci: sopir di jalan tetap produktif — sinyal hilang bukan alasan data hilang.</a:t>
+              <a:t>📡  Kunci: aplikasi ini “hidup” — begitu ada yang mengajukan, yang berwenang langsung tahu, bukan besok pagi.</a:t>
             </a:r>
           </a:p>
         </p:txBody>
       </p:sp>
       <p:pic>
         <p:nvPicPr>
-          <p:cNvPr id="7" name="Picture 6" descr="bpf-badge.png"/>
+          <p:cNvPr id="18" name="Picture 17" descr="bpf-badge.png"/>
           <p:cNvPicPr>
             <a:picLocks noChangeAspect="1"/>
           </p:cNvPicPr>
@@ -10011,7 +11197,7 @@
       </p:pic>
       <p:sp>
         <p:nvSpPr>
-          <p:cNvPr id="8" name="TextBox 7"/>
+          <p:cNvPr id="19" name="TextBox 18"/>
           <p:cNvSpPr txBox="1"/>
           <p:nvPr/>
         </p:nvSpPr>
@@ -10042,7 +11228,7 @@
                   <a:srgbClr val="64748B"/>
                 </a:solidFill>
               </a:rPr>
-              <a:t>8 / 12</a:t>
+              <a:t>7 / 13</a:t>
             </a:r>
           </a:p>
         </p:txBody>
@@ -10098,7 +11284,7 @@
                   <a:srgbClr val="2563EB"/>
                 </a:solidFill>
               </a:rPr>
-              <a:t>DEMO PENDUKUNG</a:t>
+              <a:t>DEMO UTAMA 6</a:t>
             </a:r>
           </a:p>
         </p:txBody>
@@ -10136,32 +11322,128 @@
                   <a:srgbClr val="0F172A"/>
                 </a:solidFill>
               </a:rPr>
-              <a:t>Marketing &amp; Chief Driver</a:t>
-            </a:r>
-          </a:p>
-        </p:txBody>
-      </p:sp>
-      <p:sp>
-        <p:nvSpPr>
-          <p:cNvPr id="4" name="Rectangle 3"/>
+              <a:t>Driver: Offline di Jalan</a:t>
+            </a:r>
+          </a:p>
+        </p:txBody>
+      </p:sp>
+      <p:sp>
+        <p:nvSpPr>
+          <p:cNvPr id="4" name="TextBox 3"/>
+          <p:cNvSpPr txBox="1"/>
+          <p:nvPr/>
+        </p:nvSpPr>
+        <p:spPr>
+          <a:xfrm>
+            <a:off x="1005840" y="1828800"/>
+            <a:ext cx="10241280" cy="3474720"/>
+          </a:xfrm>
+          <a:prstGeom prst="rect">
+            <a:avLst/>
+          </a:prstGeom>
+          <a:noFill/>
+        </p:spPr>
+        <p:txBody>
+          <a:bodyPr wrap="square">
+            <a:spAutoFit/>
+          </a:bodyPr>
+          <a:lstStyle/>
+          <a:p>
+            <a:pPr>
+              <a:lnSpc>
+                <a:spcPct val="170000"/>
+              </a:lnSpc>
+            </a:pPr>
+            <a:r>
+              <a:rPr sz="1900">
+                <a:solidFill>
+                  <a:srgbClr val="64748B"/>
+                </a:solidFill>
+              </a:rPr>
+              <a:t>→  Login PIN — identitas menempel otomatis di semua laporan (tidak bisa mengaku-ngaku).</a:t>
+            </a:r>
+          </a:p>
+          <a:p>
+            <a:pPr>
+              <a:lnSpc>
+                <a:spcPct val="170000"/>
+              </a:lnSpc>
+            </a:pPr>
+            <a:r>
+              <a:rPr sz="1900">
+                <a:solidFill>
+                  <a:srgbClr val="64748B"/>
+                </a:solidFill>
+              </a:rPr>
+              <a:t>→  4 tab: ⛽ BBM · 💰 Kasbon · 🗺️ Trip · 📊 Rapor.</a:t>
+            </a:r>
+          </a:p>
+          <a:p>
+            <a:pPr>
+              <a:lnSpc>
+                <a:spcPct val="170000"/>
+              </a:lnSpc>
+            </a:pPr>
+            <a:r>
+              <a:rPr sz="1900">
+                <a:solidFill>
+                  <a:srgbClr val="64748B"/>
+                </a:solidFill>
+              </a:rPr>
+              <a:t>→  Offline-first: data tersimpan di HP, terkirim otomatis saat sinyal kembali + tombol 🔄 Sinkron.</a:t>
+            </a:r>
+          </a:p>
+          <a:p>
+            <a:pPr>
+              <a:lnSpc>
+                <a:spcPct val="170000"/>
+              </a:lnSpc>
+            </a:pPr>
+            <a:r>
+              <a:rPr sz="1900">
+                <a:solidFill>
+                  <a:srgbClr val="64748B"/>
+                </a:solidFill>
+              </a:rPr>
+              <a:t>→  Rapor performa: masukkan nopol → HEMAT / CUKUP / BOROS.</a:t>
+            </a:r>
+          </a:p>
+          <a:p>
+            <a:pPr>
+              <a:lnSpc>
+                <a:spcPct val="170000"/>
+              </a:lnSpc>
+            </a:pPr>
+            <a:r>
+              <a:rPr sz="1900">
+                <a:solidFill>
+                  <a:srgbClr val="64748B"/>
+                </a:solidFill>
+              </a:rPr>
+              <a:t>→  Bisa dipasang di layar utama HP seperti aplikasi biasa (PWA).</a:t>
+            </a:r>
+          </a:p>
+        </p:txBody>
+      </p:sp>
+      <p:sp>
+        <p:nvSpPr>
+          <p:cNvPr id="5" name="Rectangle 4"/>
           <p:cNvSpPr/>
           <p:nvPr/>
         </p:nvSpPr>
         <p:spPr>
           <a:xfrm>
-            <a:off x="822960" y="2011680"/>
-            <a:ext cx="-125413846200" cy="2926080"/>
+            <a:off x="822960" y="5394960"/>
+            <a:ext cx="10515600" cy="868680"/>
           </a:xfrm>
           <a:prstGeom prst="rect">
             <a:avLst/>
           </a:prstGeom>
           <a:solidFill>
-            <a:srgbClr val="FFFFFF"/>
+            <a:srgbClr val="EFF6FF"/>
           </a:solidFill>
-          <a:ln w="12700">
-            <a:solidFill>
-              <a:srgbClr val="E2E8F0"/>
-            </a:solidFill>
+          <a:ln>
+            <a:noFill/>
           </a:ln>
         </p:spPr>
         <p:style>
@@ -10188,323 +11470,7 @@
       </p:sp>
       <p:sp>
         <p:nvSpPr>
-          <p:cNvPr id="5" name="TextBox 4"/>
-          <p:cNvSpPr txBox="1"/>
-          <p:nvPr/>
-        </p:nvSpPr>
-        <p:spPr>
-          <a:xfrm>
-            <a:off x="1051560" y="2286000"/>
-            <a:ext cx="-125414303400" cy="548640"/>
-          </a:xfrm>
-          <a:prstGeom prst="rect">
-            <a:avLst/>
-          </a:prstGeom>
-          <a:noFill/>
-        </p:spPr>
-        <p:txBody>
-          <a:bodyPr wrap="square" anchor="t">
-            <a:spAutoFit/>
-          </a:bodyPr>
-          <a:lstStyle/>
-          <a:p>
-            <a:pPr algn="l">
-              <a:lnSpc>
-                <a:spcPct val="115000"/>
-              </a:lnSpc>
-            </a:pPr>
-            <a:r>
-              <a:rPr sz="2800" b="0">
-                <a:solidFill>
-                  <a:srgbClr val="0F172A"/>
-                </a:solidFill>
-              </a:rPr>
-              <a:t>📅</a:t>
-            </a:r>
-          </a:p>
-        </p:txBody>
-      </p:sp>
-      <p:sp>
-        <p:nvSpPr>
           <p:cNvPr id="6" name="TextBox 5"/>
-          <p:cNvSpPr txBox="1"/>
-          <p:nvPr/>
-        </p:nvSpPr>
-        <p:spPr>
-          <a:xfrm>
-            <a:off x="1051560" y="2926080"/>
-            <a:ext cx="-125414303400" cy="548640"/>
-          </a:xfrm>
-          <a:prstGeom prst="rect">
-            <a:avLst/>
-          </a:prstGeom>
-          <a:noFill/>
-        </p:spPr>
-        <p:txBody>
-          <a:bodyPr wrap="square" anchor="t">
-            <a:spAutoFit/>
-          </a:bodyPr>
-          <a:lstStyle/>
-          <a:p>
-            <a:pPr algn="l">
-              <a:lnSpc>
-                <a:spcPct val="115000"/>
-              </a:lnSpc>
-            </a:pPr>
-            <a:r>
-              <a:rPr sz="1700" b="1">
-                <a:solidFill>
-                  <a:srgbClr val="0F172A"/>
-                </a:solidFill>
-              </a:rPr>
-              <a:t>Marketing Hub</a:t>
-            </a:r>
-          </a:p>
-        </p:txBody>
-      </p:sp>
-      <p:sp>
-        <p:nvSpPr>
-          <p:cNvPr id="7" name="TextBox 6"/>
-          <p:cNvSpPr txBox="1"/>
-          <p:nvPr/>
-        </p:nvSpPr>
-        <p:spPr>
-          <a:xfrm>
-            <a:off x="1051560" y="3429000"/>
-            <a:ext cx="-125414303400" cy="1371600"/>
-          </a:xfrm>
-          <a:prstGeom prst="rect">
-            <a:avLst/>
-          </a:prstGeom>
-          <a:noFill/>
-        </p:spPr>
-        <p:txBody>
-          <a:bodyPr wrap="square" anchor="t">
-            <a:spAutoFit/>
-          </a:bodyPr>
-          <a:lstStyle/>
-          <a:p>
-            <a:pPr algn="l">
-              <a:lnSpc>
-                <a:spcPct val="115000"/>
-              </a:lnSpc>
-            </a:pPr>
-            <a:r>
-              <a:rPr sz="1300" b="0">
-                <a:solidFill>
-                  <a:srgbClr val="64748B"/>
-                </a:solidFill>
-              </a:rPr>
-              <a:t>Input appointment, pantau status, lihat hasil kunjungan — data penjualan tersaji otomatis</a:t>
-            </a:r>
-          </a:p>
-        </p:txBody>
-      </p:sp>
-      <p:sp>
-        <p:nvSpPr>
-          <p:cNvPr id="8" name="Rectangle 7"/>
-          <p:cNvSpPr/>
-          <p:nvPr/>
-        </p:nvSpPr>
-        <p:spPr>
-          <a:xfrm>
-            <a:off x="-125412748920" y="2011680"/>
-            <a:ext cx="-125413846200" cy="2926080"/>
-          </a:xfrm>
-          <a:prstGeom prst="rect">
-            <a:avLst/>
-          </a:prstGeom>
-          <a:solidFill>
-            <a:srgbClr val="FFFFFF"/>
-          </a:solidFill>
-          <a:ln w="12700">
-            <a:solidFill>
-              <a:srgbClr val="E2E8F0"/>
-            </a:solidFill>
-          </a:ln>
-        </p:spPr>
-        <p:style>
-          <a:lnRef idx="1">
-            <a:schemeClr val="accent1"/>
-          </a:lnRef>
-          <a:fillRef idx="3">
-            <a:schemeClr val="accent1"/>
-          </a:fillRef>
-          <a:effectRef idx="2">
-            <a:schemeClr val="accent1"/>
-          </a:effectRef>
-          <a:fontRef idx="minor">
-            <a:schemeClr val="lt1"/>
-          </a:fontRef>
-        </p:style>
-        <p:txBody>
-          <a:bodyPr rtlCol="0" anchor="ctr"/>
-          <a:lstStyle/>
-          <a:p>
-            <a:pPr algn="ctr"/>
-          </a:p>
-        </p:txBody>
-      </p:sp>
-      <p:sp>
-        <p:nvSpPr>
-          <p:cNvPr id="9" name="TextBox 8"/>
-          <p:cNvSpPr txBox="1"/>
-          <p:nvPr/>
-        </p:nvSpPr>
-        <p:spPr>
-          <a:xfrm>
-            <a:off x="-125412520320" y="2286000"/>
-            <a:ext cx="-125414303400" cy="548640"/>
-          </a:xfrm>
-          <a:prstGeom prst="rect">
-            <a:avLst/>
-          </a:prstGeom>
-          <a:noFill/>
-        </p:spPr>
-        <p:txBody>
-          <a:bodyPr wrap="square" anchor="t">
-            <a:spAutoFit/>
-          </a:bodyPr>
-          <a:lstStyle/>
-          <a:p>
-            <a:pPr algn="l">
-              <a:lnSpc>
-                <a:spcPct val="115000"/>
-              </a:lnSpc>
-            </a:pPr>
-            <a:r>
-              <a:rPr sz="2800" b="0">
-                <a:solidFill>
-                  <a:srgbClr val="0F172A"/>
-                </a:solidFill>
-              </a:rPr>
-              <a:t>🚛</a:t>
-            </a:r>
-          </a:p>
-        </p:txBody>
-      </p:sp>
-      <p:sp>
-        <p:nvSpPr>
-          <p:cNvPr id="10" name="TextBox 9"/>
-          <p:cNvSpPr txBox="1"/>
-          <p:nvPr/>
-        </p:nvSpPr>
-        <p:spPr>
-          <a:xfrm>
-            <a:off x="-125412520320" y="2926080"/>
-            <a:ext cx="-125414303400" cy="548640"/>
-          </a:xfrm>
-          <a:prstGeom prst="rect">
-            <a:avLst/>
-          </a:prstGeom>
-          <a:noFill/>
-        </p:spPr>
-        <p:txBody>
-          <a:bodyPr wrap="square" anchor="t">
-            <a:spAutoFit/>
-          </a:bodyPr>
-          <a:lstStyle/>
-          <a:p>
-            <a:pPr algn="l">
-              <a:lnSpc>
-                <a:spcPct val="115000"/>
-              </a:lnSpc>
-            </a:pPr>
-            <a:r>
-              <a:rPr sz="1700" b="1">
-                <a:solidFill>
-                  <a:srgbClr val="0F172A"/>
-                </a:solidFill>
-              </a:rPr>
-              <a:t>Chief Driver</a:t>
-            </a:r>
-          </a:p>
-        </p:txBody>
-      </p:sp>
-      <p:sp>
-        <p:nvSpPr>
-          <p:cNvPr id="11" name="TextBox 10"/>
-          <p:cNvSpPr txBox="1"/>
-          <p:nvPr/>
-        </p:nvSpPr>
-        <p:spPr>
-          <a:xfrm>
-            <a:off x="-125412520320" y="3429000"/>
-            <a:ext cx="-125414303400" cy="1371600"/>
-          </a:xfrm>
-          <a:prstGeom prst="rect">
-            <a:avLst/>
-          </a:prstGeom>
-          <a:noFill/>
-        </p:spPr>
-        <p:txBody>
-          <a:bodyPr wrap="square" anchor="t">
-            <a:spAutoFit/>
-          </a:bodyPr>
-          <a:lstStyle/>
-          <a:p>
-            <a:pPr algn="l">
-              <a:lnSpc>
-                <a:spcPct val="115000"/>
-              </a:lnSpc>
-            </a:pPr>
-            <a:r>
-              <a:rPr sz="1300" b="0">
-                <a:solidFill>
-                  <a:srgbClr val="64748B"/>
-                </a:solidFill>
-              </a:rPr>
-              <a:t>Papan pembagian tugas: kendaraan belum ditugaskan, beban tiap driver, unduh rekap harian Excel</a:t>
-            </a:r>
-          </a:p>
-        </p:txBody>
-      </p:sp>
-      <p:sp>
-        <p:nvSpPr>
-          <p:cNvPr id="12" name="Rectangle 11"/>
-          <p:cNvSpPr/>
-          <p:nvPr/>
-        </p:nvSpPr>
-        <p:spPr>
-          <a:xfrm>
-            <a:off x="822960" y="5394960"/>
-            <a:ext cx="10515600" cy="868680"/>
-          </a:xfrm>
-          <a:prstGeom prst="rect">
-            <a:avLst/>
-          </a:prstGeom>
-          <a:solidFill>
-            <a:srgbClr val="EFF6FF"/>
-          </a:solidFill>
-          <a:ln>
-            <a:noFill/>
-          </a:ln>
-        </p:spPr>
-        <p:style>
-          <a:lnRef idx="1">
-            <a:schemeClr val="accent1"/>
-          </a:lnRef>
-          <a:fillRef idx="3">
-            <a:schemeClr val="accent1"/>
-          </a:fillRef>
-          <a:effectRef idx="2">
-            <a:schemeClr val="accent1"/>
-          </a:effectRef>
-          <a:fontRef idx="minor">
-            <a:schemeClr val="lt1"/>
-          </a:fontRef>
-        </p:style>
-        <p:txBody>
-          <a:bodyPr rtlCol="0" anchor="ctr"/>
-          <a:lstStyle/>
-          <a:p>
-            <a:pPr algn="ctr"/>
-          </a:p>
-        </p:txBody>
-      </p:sp>
-      <p:sp>
-        <p:nvSpPr>
-          <p:cNvPr id="13" name="TextBox 12"/>
           <p:cNvSpPr txBox="1"/>
           <p:nvPr/>
         </p:nvSpPr>
@@ -10535,14 +11501,14 @@
                   <a:srgbClr val="0F172A"/>
                 </a:solidFill>
               </a:rPr>
-              <a:t>🗂️  Kunci: bukan hanya BBM — penjadwalan kunjungan &amp; pembagian sopir juga satu pintu.</a:t>
+              <a:t>🌐  Kunci: sopir di jalan tetap produktif — sinyal hilang bukan alasan data hilang.</a:t>
             </a:r>
           </a:p>
         </p:txBody>
       </p:sp>
       <p:pic>
         <p:nvPicPr>
-          <p:cNvPr id="14" name="Picture 13" descr="bpf-badge.png"/>
+          <p:cNvPr id="7" name="Picture 6" descr="bpf-badge.png"/>
           <p:cNvPicPr>
             <a:picLocks noChangeAspect="1"/>
           </p:cNvPicPr>
@@ -10566,7 +11532,7 @@
       </p:pic>
       <p:sp>
         <p:nvSpPr>
-          <p:cNvPr id="15" name="TextBox 14"/>
+          <p:cNvPr id="8" name="TextBox 7"/>
           <p:cNvSpPr txBox="1"/>
           <p:nvPr/>
         </p:nvSpPr>
@@ -10597,7 +11563,7 @@
                   <a:srgbClr val="64748B"/>
                 </a:solidFill>
               </a:rPr>
-              <a:t>9 / 12</a:t>
+              <a:t>8 / 13</a:t>
             </a:r>
           </a:p>
         </p:txBody>
